--- a/20261005_サンクスLINE誘導のご提案_業界別.pptx
+++ b/20261005_サンクスLINE誘導のご提案_業界別.pptx
@@ -5067,9 +5067,33 @@
           </a:fontRef>
         </p:style>
       </p:cxnSp>
-      <p:sp>
-        <p:nvSpPr>
-          <p:cNvPr id="8" name="Oval 7"/>
+      <p:pic>
+        <p:nvPicPr>
+          <p:cNvPr id="8" name="Picture 7" descr="thanks_scene_1.png"/>
+          <p:cNvPicPr>
+            <a:picLocks noChangeAspect="1"/>
+          </p:cNvPicPr>
+          <p:nvPr/>
+        </p:nvPicPr>
+        <p:blipFill>
+          <a:blip r:embed="rId2"/>
+          <a:stretch>
+            <a:fillRect/>
+          </a:stretch>
+        </p:blipFill>
+        <p:spPr>
+          <a:xfrm>
+            <a:off x="4108168" y="1692000"/>
+            <a:ext cx="1771831" cy="2214000"/>
+          </a:xfrm>
+          <a:prstGeom prst="rect">
+            <a:avLst/>
+          </a:prstGeom>
+        </p:spPr>
+      </p:pic>
+      <p:sp>
+        <p:nvSpPr>
+          <p:cNvPr id="9" name="Oval 8"/>
           <p:cNvSpPr/>
           <p:nvPr/>
         </p:nvSpPr>
@@ -5131,14 +5155,14 @@
       </p:sp>
       <p:sp>
         <p:nvSpPr>
-          <p:cNvPr id="9" name="TextBox 8"/>
+          <p:cNvPr id="10" name="TextBox 9"/>
           <p:cNvSpPr txBox="1"/>
           <p:nvPr/>
         </p:nvSpPr>
         <p:spPr>
           <a:xfrm>
             <a:off x="1224000" y="1746000"/>
-            <a:ext cx="2340000" cy="413999"/>
+            <a:ext cx="2520000" cy="413999"/>
           </a:xfrm>
           <a:prstGeom prst="rect">
             <a:avLst/>
@@ -5175,14 +5199,233 @@
       </p:sp>
       <p:sp>
         <p:nvSpPr>
-          <p:cNvPr id="10" name="TextBox 9"/>
+          <p:cNvPr id="11" name="Rounded Rectangle 10"/>
+          <p:cNvSpPr/>
+          <p:nvPr/>
+        </p:nvSpPr>
+        <p:spPr>
+          <a:xfrm>
+            <a:off x="792000" y="2322000"/>
+            <a:ext cx="1224000" cy="756000"/>
+          </a:xfrm>
+          <a:prstGeom prst="roundRect">
+            <a:avLst>
+              <a:gd name="adj" fmla="val 15000"/>
+            </a:avLst>
+          </a:prstGeom>
+          <a:solidFill>
+            <a:srgbClr val="E4E8F6"/>
+          </a:solidFill>
+          <a:ln>
+            <a:noFill/>
+          </a:ln>
+          <a:effectLst/>
+        </p:spPr>
+        <p:style>
+          <a:lnRef idx="1">
+            <a:schemeClr val="accent1"/>
+          </a:lnRef>
+          <a:fillRef idx="3">
+            <a:schemeClr val="accent1"/>
+          </a:fillRef>
+          <a:effectRef idx="0">
+            <a:schemeClr val="accent1"/>
+          </a:effectRef>
+          <a:fontRef idx="minor">
+            <a:schemeClr val="lt1"/>
+          </a:fontRef>
+        </p:style>
+        <p:txBody>
+          <a:bodyPr rtlCol="0" anchor="ctr" wrap="square" lIns="36000" tIns="0" rIns="36000" bIns="0"/>
+          <a:lstStyle/>
+          <a:p>
+            <a:pPr algn="ctr">
+              <a:lnSpc>
+                <a:spcPct val="110000"/>
+              </a:lnSpc>
+              <a:spcAft>
+                <a:spcPts val="0"/>
+              </a:spcAft>
+            </a:pPr>
+            <a:r>
+              <a:rPr sz="1200" b="1">
+                <a:solidFill>
+                  <a:srgbClr val="1F285A"/>
+                </a:solidFill>
+                <a:latin typeface="メイリオ"/>
+                <a:ea typeface="メイリオ"/>
+                <a:cs typeface="メイリオ"/>
+              </a:rPr>
+              <a:t>応募・</a:t>
+            </a:r>
+          </a:p>
+          <a:p>
+            <a:pPr algn="ctr">
+              <a:lnSpc>
+                <a:spcPct val="110000"/>
+              </a:lnSpc>
+              <a:spcAft>
+                <a:spcPts val="0"/>
+              </a:spcAft>
+            </a:pPr>
+            <a:r>
+              <a:rPr sz="1200" b="1">
+                <a:solidFill>
+                  <a:srgbClr val="1F285A"/>
+                </a:solidFill>
+                <a:latin typeface="メイリオ"/>
+                <a:ea typeface="メイリオ"/>
+                <a:cs typeface="メイリオ"/>
+              </a:rPr>
+              <a:t>会員登録</a:t>
+            </a:r>
+          </a:p>
+        </p:txBody>
+      </p:sp>
+      <p:cxnSp>
+        <p:nvCxnSpPr>
+          <p:cNvPr id="12" name="Connector 11"/>
+          <p:cNvCxnSpPr/>
+          <p:nvPr/>
+        </p:nvCxnSpPr>
+        <p:spPr>
+          <a:xfrm>
+            <a:off x="2070000" y="2700000"/>
+            <a:ext cx="324000" cy="0"/>
+          </a:xfrm>
+          <a:prstGeom prst="line">
+            <a:avLst/>
+          </a:prstGeom>
+          <a:ln w="22225">
+            <a:solidFill>
+              <a:srgbClr val="1F285A"/>
+            </a:solidFill>
+            <a:tailEnd type="triangle" w="med" len="med"/>
+          </a:ln>
+        </p:spPr>
+        <p:style>
+          <a:lnRef idx="2">
+            <a:schemeClr val="accent1"/>
+          </a:lnRef>
+          <a:fillRef idx="0">
+            <a:schemeClr val="accent1"/>
+          </a:fillRef>
+          <a:effectRef idx="0">
+            <a:schemeClr val="accent1"/>
+          </a:effectRef>
+          <a:fontRef idx="minor">
+            <a:schemeClr val="tx1"/>
+          </a:fontRef>
+        </p:style>
+      </p:cxnSp>
+      <p:sp>
+        <p:nvSpPr>
+          <p:cNvPr id="13" name="Oval 12"/>
+          <p:cNvSpPr/>
+          <p:nvPr/>
+        </p:nvSpPr>
+        <p:spPr>
+          <a:xfrm>
+            <a:off x="2448000" y="2340000"/>
+            <a:ext cx="720000" cy="720000"/>
+          </a:xfrm>
+          <a:prstGeom prst="ellipse">
+            <a:avLst/>
+          </a:prstGeom>
+          <a:solidFill>
+            <a:srgbClr val="06C755"/>
+          </a:solidFill>
+          <a:ln>
+            <a:noFill/>
+          </a:ln>
+          <a:effectLst/>
+        </p:spPr>
+        <p:style>
+          <a:lnRef idx="1">
+            <a:schemeClr val="accent1"/>
+          </a:lnRef>
+          <a:fillRef idx="3">
+            <a:schemeClr val="accent1"/>
+          </a:fillRef>
+          <a:effectRef idx="0">
+            <a:schemeClr val="accent1"/>
+          </a:effectRef>
+          <a:fontRef idx="minor">
+            <a:schemeClr val="lt1"/>
+          </a:fontRef>
+        </p:style>
+        <p:txBody>
+          <a:bodyPr rtlCol="0" anchor="ctr" wrap="square" lIns="0" tIns="0" rIns="0" bIns="0"/>
+          <a:lstStyle/>
+          <a:p>
+            <a:pPr algn="ctr">
+              <a:lnSpc>
+                <a:spcPct val="110000"/>
+              </a:lnSpc>
+              <a:spcAft>
+                <a:spcPts val="0"/>
+              </a:spcAft>
+            </a:pPr>
+            <a:r>
+              <a:rPr sz="1200" b="1">
+                <a:solidFill>
+                  <a:srgbClr val="FFFFFF"/>
+                </a:solidFill>
+                <a:latin typeface="メイリオ"/>
+                <a:ea typeface="メイリオ"/>
+                <a:cs typeface="メイリオ"/>
+              </a:rPr>
+              <a:t>LINE</a:t>
+            </a:r>
+          </a:p>
+        </p:txBody>
+      </p:sp>
+      <p:cxnSp>
+        <p:nvCxnSpPr>
+          <p:cNvPr id="14" name="Connector 13"/>
+          <p:cNvCxnSpPr/>
+          <p:nvPr/>
+        </p:nvCxnSpPr>
+        <p:spPr>
+          <a:xfrm>
+            <a:off x="3221999" y="2700000"/>
+            <a:ext cx="832169" cy="0"/>
+          </a:xfrm>
+          <a:prstGeom prst="line">
+            <a:avLst/>
+          </a:prstGeom>
+          <a:ln w="22225">
+            <a:solidFill>
+              <a:srgbClr val="1F285A"/>
+            </a:solidFill>
+            <a:tailEnd type="triangle" w="med" len="med"/>
+          </a:ln>
+        </p:spPr>
+        <p:style>
+          <a:lnRef idx="2">
+            <a:schemeClr val="accent1"/>
+          </a:lnRef>
+          <a:fillRef idx="0">
+            <a:schemeClr val="accent1"/>
+          </a:fillRef>
+          <a:effectRef idx="0">
+            <a:schemeClr val="accent1"/>
+          </a:effectRef>
+          <a:fontRef idx="minor">
+            <a:schemeClr val="tx1"/>
+          </a:fontRef>
+        </p:style>
+      </p:cxnSp>
+      <p:sp>
+        <p:nvSpPr>
+          <p:cNvPr id="15" name="TextBox 14"/>
           <p:cNvSpPr txBox="1"/>
           <p:nvPr/>
         </p:nvSpPr>
         <p:spPr>
           <a:xfrm>
-            <a:off x="1850400" y="1782000"/>
-            <a:ext cx="2880000" cy="342000"/>
+            <a:off x="792000" y="3221999"/>
+            <a:ext cx="3244168" cy="216000"/>
           </a:xfrm>
           <a:prstGeom prst="rect">
             <a:avLst/>
@@ -5190,7 +5433,7 @@
           <a:noFill/>
         </p:spPr>
         <p:txBody>
-          <a:bodyPr wrap="square" anchor="ctr" lIns="36000" rIns="36000" tIns="18000" bIns="18000">
+          <a:bodyPr wrap="square" anchor="t" lIns="36000" rIns="36000" tIns="18000" bIns="18000">
             <a:spAutoFit/>
           </a:bodyPr>
           <a:lstStyle/>
@@ -5204,7 +5447,7 @@
               </a:spcAft>
             </a:pPr>
             <a:r>
-              <a:rPr sz="1000" b="0">
+              <a:rPr sz="950" b="0">
                 <a:solidFill>
                   <a:srgbClr val="7F7F7F"/>
                 </a:solidFill>
@@ -5212,29 +5455,95 @@
                 <a:ea typeface="メイリオ"/>
                 <a:cs typeface="メイリオ"/>
               </a:rPr>
-              <a:t>採用・転職・求人サービス</a:t>
-            </a:r>
-          </a:p>
-        </p:txBody>
-      </p:sp>
-      <p:sp>
-        <p:nvSpPr>
-          <p:cNvPr id="11" name="Rounded Rectangle 10"/>
+              <a:t>その後の配信</a:t>
+            </a:r>
+          </a:p>
+        </p:txBody>
+      </p:sp>
+      <p:sp>
+        <p:nvSpPr>
+          <p:cNvPr id="16" name="TextBox 15"/>
+          <p:cNvSpPr txBox="1"/>
+          <p:nvPr/>
+        </p:nvSpPr>
+        <p:spPr>
+          <a:xfrm>
+            <a:off x="792000" y="3420000"/>
+            <a:ext cx="3244168" cy="324000"/>
+          </a:xfrm>
+          <a:prstGeom prst="rect">
+            <a:avLst/>
+          </a:prstGeom>
+          <a:noFill/>
+        </p:spPr>
+        <p:txBody>
+          <a:bodyPr wrap="square" anchor="t" lIns="36000" rIns="36000" tIns="18000" bIns="18000">
+            <a:spAutoFit/>
+          </a:bodyPr>
+          <a:lstStyle/>
+          <a:p>
+            <a:pPr algn="l">
+              <a:lnSpc>
+                <a:spcPct val="110000"/>
+              </a:lnSpc>
+              <a:spcAft>
+                <a:spcPts val="0"/>
+              </a:spcAft>
+            </a:pPr>
+            <a:r>
+              <a:rPr sz="1100" b="1">
+                <a:solidFill>
+                  <a:srgbClr val="1F285A"/>
+                </a:solidFill>
+                <a:latin typeface="メイリオ"/>
+                <a:ea typeface="メイリオ"/>
+                <a:cs typeface="メイリオ"/>
+              </a:rPr>
+              <a:t>前日リマインド／求人紹介／選考のご案内</a:t>
+            </a:r>
+          </a:p>
+        </p:txBody>
+      </p:sp>
+      <p:pic>
+        <p:nvPicPr>
+          <p:cNvPr id="17" name="Picture 16" descr="thanks_scene_2.png"/>
+          <p:cNvPicPr>
+            <a:picLocks noChangeAspect="1"/>
+          </p:cNvPicPr>
+          <p:nvPr/>
+        </p:nvPicPr>
+        <p:blipFill>
+          <a:blip r:embed="rId3"/>
+          <a:stretch>
+            <a:fillRect/>
+          </a:stretch>
+        </p:blipFill>
+        <p:spPr>
+          <a:xfrm>
+            <a:off x="9628168" y="1692000"/>
+            <a:ext cx="1771831" cy="2214000"/>
+          </a:xfrm>
+          <a:prstGeom prst="rect">
+            <a:avLst/>
+          </a:prstGeom>
+        </p:spPr>
+      </p:pic>
+      <p:sp>
+        <p:nvSpPr>
+          <p:cNvPr id="18" name="Oval 17"/>
           <p:cNvSpPr/>
           <p:nvPr/>
         </p:nvSpPr>
         <p:spPr>
           <a:xfrm>
-            <a:off x="792000" y="2520000"/>
-            <a:ext cx="1296000" cy="936000"/>
-          </a:xfrm>
-          <a:prstGeom prst="roundRect">
-            <a:avLst>
-              <a:gd name="adj" fmla="val 15000"/>
-            </a:avLst>
-          </a:prstGeom>
-          <a:solidFill>
-            <a:srgbClr val="E4E8F6"/>
+            <a:off x="6312000" y="1782000"/>
+            <a:ext cx="342000" cy="342000"/>
+          </a:xfrm>
+          <a:prstGeom prst="ellipse">
+            <a:avLst/>
+          </a:prstGeom>
+          <a:solidFill>
+            <a:srgbClr val="1F285A"/>
           </a:solidFill>
           <a:ln>
             <a:noFill/>
@@ -5256,7 +5565,7 @@
           </a:fontRef>
         </p:style>
         <p:txBody>
-          <a:bodyPr rtlCol="0" anchor="ctr" wrap="square" lIns="36000" tIns="0" rIns="36000" bIns="0"/>
+          <a:bodyPr rtlCol="0" anchor="ctr" wrap="square" lIns="0" tIns="0" rIns="0" bIns="0"/>
           <a:lstStyle/>
           <a:p>
             <a:pPr algn="ctr">
@@ -5270,15 +5579,102 @@
             <a:r>
               <a:rPr sz="1200" b="1">
                 <a:solidFill>
+                  <a:srgbClr val="FFFFFF"/>
+                </a:solidFill>
+                <a:latin typeface="メイリオ"/>
+                <a:ea typeface="メイリオ"/>
+                <a:cs typeface="メイリオ"/>
+              </a:rPr>
+              <a:t>2</a:t>
+            </a:r>
+          </a:p>
+        </p:txBody>
+      </p:sp>
+      <p:sp>
+        <p:nvSpPr>
+          <p:cNvPr id="19" name="TextBox 18"/>
+          <p:cNvSpPr txBox="1"/>
+          <p:nvPr/>
+        </p:nvSpPr>
+        <p:spPr>
+          <a:xfrm>
+            <a:off x="6744000" y="1746000"/>
+            <a:ext cx="2520000" cy="413999"/>
+          </a:xfrm>
+          <a:prstGeom prst="rect">
+            <a:avLst/>
+          </a:prstGeom>
+          <a:noFill/>
+        </p:spPr>
+        <p:txBody>
+          <a:bodyPr wrap="square" anchor="ctr" lIns="36000" rIns="36000" tIns="18000" bIns="18000">
+            <a:spAutoFit/>
+          </a:bodyPr>
+          <a:lstStyle/>
+          <a:p>
+            <a:pPr algn="l">
+              <a:lnSpc>
+                <a:spcPct val="110000"/>
+              </a:lnSpc>
+              <a:spcAft>
+                <a:spcPts val="0"/>
+              </a:spcAft>
+            </a:pPr>
+            <a:r>
+              <a:rPr sz="1600" b="1">
+                <a:solidFill>
                   <a:srgbClr val="1F285A"/>
                 </a:solidFill>
                 <a:latin typeface="メイリオ"/>
                 <a:ea typeface="メイリオ"/>
                 <a:cs typeface="メイリオ"/>
               </a:rPr>
-              <a:t>応募・</a:t>
-            </a:r>
-          </a:p>
+              <a:t>不動産投資</a:t>
+            </a:r>
+          </a:p>
+        </p:txBody>
+      </p:sp>
+      <p:sp>
+        <p:nvSpPr>
+          <p:cNvPr id="20" name="Rounded Rectangle 19"/>
+          <p:cNvSpPr/>
+          <p:nvPr/>
+        </p:nvSpPr>
+        <p:spPr>
+          <a:xfrm>
+            <a:off x="6312000" y="2322000"/>
+            <a:ext cx="1224000" cy="756000"/>
+          </a:xfrm>
+          <a:prstGeom prst="roundRect">
+            <a:avLst>
+              <a:gd name="adj" fmla="val 15000"/>
+            </a:avLst>
+          </a:prstGeom>
+          <a:solidFill>
+            <a:srgbClr val="E4E8F6"/>
+          </a:solidFill>
+          <a:ln>
+            <a:noFill/>
+          </a:ln>
+          <a:effectLst/>
+        </p:spPr>
+        <p:style>
+          <a:lnRef idx="1">
+            <a:schemeClr val="accent1"/>
+          </a:lnRef>
+          <a:fillRef idx="3">
+            <a:schemeClr val="accent1"/>
+          </a:fillRef>
+          <a:effectRef idx="0">
+            <a:schemeClr val="accent1"/>
+          </a:effectRef>
+          <a:fontRef idx="minor">
+            <a:schemeClr val="lt1"/>
+          </a:fontRef>
+        </p:style>
+        <p:txBody>
+          <a:bodyPr rtlCol="0" anchor="ctr" wrap="square" lIns="36000" tIns="0" rIns="36000" bIns="0"/>
+          <a:lstStyle/>
           <a:p>
             <a:pPr algn="ctr">
               <a:lnSpc>
@@ -5297,86 +5693,9 @@
                 <a:ea typeface="メイリオ"/>
                 <a:cs typeface="メイリオ"/>
               </a:rPr>
-              <a:t>会員登録</a:t>
-            </a:r>
-          </a:p>
-        </p:txBody>
-      </p:sp>
-      <p:cxnSp>
-        <p:nvCxnSpPr>
-          <p:cNvPr id="12" name="Connector 11"/>
-          <p:cNvCxnSpPr/>
-          <p:nvPr/>
-        </p:nvCxnSpPr>
-        <p:spPr>
-          <a:xfrm>
-            <a:off x="2142000" y="2988000"/>
-            <a:ext cx="360000" cy="0"/>
-          </a:xfrm>
-          <a:prstGeom prst="line">
-            <a:avLst/>
-          </a:prstGeom>
-          <a:ln w="22225">
-            <a:solidFill>
-              <a:srgbClr val="1F285A"/>
-            </a:solidFill>
-            <a:tailEnd type="triangle" w="med" len="med"/>
-          </a:ln>
-        </p:spPr>
-        <p:style>
-          <a:lnRef idx="2">
-            <a:schemeClr val="accent1"/>
-          </a:lnRef>
-          <a:fillRef idx="0">
-            <a:schemeClr val="accent1"/>
-          </a:fillRef>
-          <a:effectRef idx="0">
-            <a:schemeClr val="accent1"/>
-          </a:effectRef>
-          <a:fontRef idx="minor">
-            <a:schemeClr val="tx1"/>
-          </a:fontRef>
-        </p:style>
-      </p:cxnSp>
-      <p:sp>
-        <p:nvSpPr>
-          <p:cNvPr id="13" name="Oval 12"/>
-          <p:cNvSpPr/>
-          <p:nvPr/>
-        </p:nvSpPr>
-        <p:spPr>
-          <a:xfrm>
-            <a:off x="2556000" y="2574000"/>
-            <a:ext cx="827999" cy="827999"/>
-          </a:xfrm>
-          <a:prstGeom prst="ellipse">
-            <a:avLst/>
-          </a:prstGeom>
-          <a:solidFill>
-            <a:srgbClr val="06C755"/>
-          </a:solidFill>
-          <a:ln>
-            <a:noFill/>
-          </a:ln>
-          <a:effectLst/>
-        </p:spPr>
-        <p:style>
-          <a:lnRef idx="1">
-            <a:schemeClr val="accent1"/>
-          </a:lnRef>
-          <a:fillRef idx="3">
-            <a:schemeClr val="accent1"/>
-          </a:fillRef>
-          <a:effectRef idx="0">
-            <a:schemeClr val="accent1"/>
-          </a:effectRef>
-          <a:fontRef idx="minor">
-            <a:schemeClr val="lt1"/>
-          </a:fontRef>
-        </p:style>
-        <p:txBody>
-          <a:bodyPr rtlCol="0" anchor="ctr" wrap="square" lIns="0" tIns="0" rIns="0" bIns="0"/>
-          <a:lstStyle/>
+              <a:t>資料請求・</a:t>
+            </a:r>
+          </a:p>
           <a:p>
             <a:pPr algn="ctr">
               <a:lnSpc>
@@ -5387,29 +5706,29 @@
               </a:spcAft>
             </a:pPr>
             <a:r>
-              <a:rPr sz="1300" b="1">
-                <a:solidFill>
-                  <a:srgbClr val="FFFFFF"/>
-                </a:solidFill>
-                <a:latin typeface="メイリオ"/>
-                <a:ea typeface="メイリオ"/>
-                <a:cs typeface="メイリオ"/>
-              </a:rPr>
-              <a:t>LINE</a:t>
+              <a:rPr sz="1200" b="1">
+                <a:solidFill>
+                  <a:srgbClr val="1F285A"/>
+                </a:solidFill>
+                <a:latin typeface="メイリオ"/>
+                <a:ea typeface="メイリオ"/>
+                <a:cs typeface="メイリオ"/>
+              </a:rPr>
+              <a:t>相談予約</a:t>
             </a:r>
           </a:p>
         </p:txBody>
       </p:sp>
       <p:cxnSp>
         <p:nvCxnSpPr>
-          <p:cNvPr id="14" name="Connector 13"/>
+          <p:cNvPr id="21" name="Connector 20"/>
           <p:cNvCxnSpPr/>
           <p:nvPr/>
         </p:nvCxnSpPr>
         <p:spPr>
           <a:xfrm>
-            <a:off x="3438000" y="2988000"/>
-            <a:ext cx="360000" cy="0"/>
+            <a:off x="7590000" y="2700000"/>
+            <a:ext cx="324000" cy="0"/>
           </a:xfrm>
           <a:prstGeom prst="line">
             <a:avLst/>
@@ -5438,27 +5757,23 @@
       </p:cxnSp>
       <p:sp>
         <p:nvSpPr>
-          <p:cNvPr id="15" name="Rounded Rectangle 14"/>
+          <p:cNvPr id="22" name="Oval 21"/>
           <p:cNvSpPr/>
           <p:nvPr/>
         </p:nvSpPr>
         <p:spPr>
           <a:xfrm>
-            <a:off x="3851999" y="2394000"/>
-            <a:ext cx="2028000" cy="360000"/>
-          </a:xfrm>
-          <a:prstGeom prst="roundRect">
-            <a:avLst>
-              <a:gd name="adj" fmla="val 50000"/>
-            </a:avLst>
-          </a:prstGeom>
-          <a:solidFill>
-            <a:srgbClr val="FFFFFF"/>
-          </a:solidFill>
-          <a:ln w="9525">
-            <a:solidFill>
-              <a:srgbClr val="1F285A"/>
-            </a:solidFill>
+            <a:off x="7968000" y="2340000"/>
+            <a:ext cx="720000" cy="720000"/>
+          </a:xfrm>
+          <a:prstGeom prst="ellipse">
+            <a:avLst/>
+          </a:prstGeom>
+          <a:solidFill>
+            <a:srgbClr val="06C755"/>
+          </a:solidFill>
+          <a:ln>
+            <a:noFill/>
           </a:ln>
           <a:effectLst/>
         </p:spPr>
@@ -5477,7 +5792,7 @@
           </a:fontRef>
         </p:style>
         <p:txBody>
-          <a:bodyPr rtlCol="0" anchor="ctr" wrap="square" lIns="36000" tIns="0" rIns="36000" bIns="0"/>
+          <a:bodyPr rtlCol="0" anchor="ctr" wrap="square" lIns="0" tIns="0" rIns="0" bIns="0"/>
           <a:lstStyle/>
           <a:p>
             <a:pPr algn="ctr">
@@ -5489,42 +5804,186 @@
               </a:spcAft>
             </a:pPr>
             <a:r>
-              <a:rPr sz="1150" b="1">
-                <a:solidFill>
-                  <a:srgbClr val="1F285A"/>
-                </a:solidFill>
-                <a:latin typeface="メイリオ"/>
-                <a:ea typeface="メイリオ"/>
-                <a:cs typeface="メイリオ"/>
-              </a:rPr>
-              <a:t>面談日時の案内</a:t>
-            </a:r>
-          </a:p>
-        </p:txBody>
-      </p:sp>
-      <p:sp>
-        <p:nvSpPr>
-          <p:cNvPr id="16" name="Rounded Rectangle 15"/>
-          <p:cNvSpPr/>
-          <p:nvPr/>
-        </p:nvSpPr>
-        <p:spPr>
-          <a:xfrm>
-            <a:off x="3851999" y="2808000"/>
-            <a:ext cx="2028000" cy="360000"/>
-          </a:xfrm>
-          <a:prstGeom prst="roundRect">
-            <a:avLst>
-              <a:gd name="adj" fmla="val 50000"/>
-            </a:avLst>
-          </a:prstGeom>
-          <a:solidFill>
-            <a:srgbClr val="FFFFFF"/>
-          </a:solidFill>
-          <a:ln w="9525">
+              <a:rPr sz="1200" b="1">
+                <a:solidFill>
+                  <a:srgbClr val="FFFFFF"/>
+                </a:solidFill>
+                <a:latin typeface="メイリオ"/>
+                <a:ea typeface="メイリオ"/>
+                <a:cs typeface="メイリオ"/>
+              </a:rPr>
+              <a:t>LINE</a:t>
+            </a:r>
+          </a:p>
+        </p:txBody>
+      </p:sp>
+      <p:cxnSp>
+        <p:nvCxnSpPr>
+          <p:cNvPr id="23" name="Connector 22"/>
+          <p:cNvCxnSpPr/>
+          <p:nvPr/>
+        </p:nvCxnSpPr>
+        <p:spPr>
+          <a:xfrm>
+            <a:off x="8742000" y="2700000"/>
+            <a:ext cx="832168" cy="0"/>
+          </a:xfrm>
+          <a:prstGeom prst="line">
+            <a:avLst/>
+          </a:prstGeom>
+          <a:ln w="22225">
             <a:solidFill>
               <a:srgbClr val="1F285A"/>
             </a:solidFill>
+            <a:tailEnd type="triangle" w="med" len="med"/>
+          </a:ln>
+        </p:spPr>
+        <p:style>
+          <a:lnRef idx="2">
+            <a:schemeClr val="accent1"/>
+          </a:lnRef>
+          <a:fillRef idx="0">
+            <a:schemeClr val="accent1"/>
+          </a:fillRef>
+          <a:effectRef idx="0">
+            <a:schemeClr val="accent1"/>
+          </a:effectRef>
+          <a:fontRef idx="minor">
+            <a:schemeClr val="tx1"/>
+          </a:fontRef>
+        </p:style>
+      </p:cxnSp>
+      <p:sp>
+        <p:nvSpPr>
+          <p:cNvPr id="24" name="TextBox 23"/>
+          <p:cNvSpPr txBox="1"/>
+          <p:nvPr/>
+        </p:nvSpPr>
+        <p:spPr>
+          <a:xfrm>
+            <a:off x="6312000" y="3221999"/>
+            <a:ext cx="3244168" cy="216000"/>
+          </a:xfrm>
+          <a:prstGeom prst="rect">
+            <a:avLst/>
+          </a:prstGeom>
+          <a:noFill/>
+        </p:spPr>
+        <p:txBody>
+          <a:bodyPr wrap="square" anchor="t" lIns="36000" rIns="36000" tIns="18000" bIns="18000">
+            <a:spAutoFit/>
+          </a:bodyPr>
+          <a:lstStyle/>
+          <a:p>
+            <a:pPr algn="l">
+              <a:lnSpc>
+                <a:spcPct val="110000"/>
+              </a:lnSpc>
+              <a:spcAft>
+                <a:spcPts val="0"/>
+              </a:spcAft>
+            </a:pPr>
+            <a:r>
+              <a:rPr sz="950" b="0">
+                <a:solidFill>
+                  <a:srgbClr val="7F7F7F"/>
+                </a:solidFill>
+                <a:latin typeface="メイリオ"/>
+                <a:ea typeface="メイリオ"/>
+                <a:cs typeface="メイリオ"/>
+              </a:rPr>
+              <a:t>その後の配信</a:t>
+            </a:r>
+          </a:p>
+        </p:txBody>
+      </p:sp>
+      <p:sp>
+        <p:nvSpPr>
+          <p:cNvPr id="25" name="TextBox 24"/>
+          <p:cNvSpPr txBox="1"/>
+          <p:nvPr/>
+        </p:nvSpPr>
+        <p:spPr>
+          <a:xfrm>
+            <a:off x="6312000" y="3420000"/>
+            <a:ext cx="3244168" cy="324000"/>
+          </a:xfrm>
+          <a:prstGeom prst="rect">
+            <a:avLst/>
+          </a:prstGeom>
+          <a:noFill/>
+        </p:spPr>
+        <p:txBody>
+          <a:bodyPr wrap="square" anchor="t" lIns="36000" rIns="36000" tIns="18000" bIns="18000">
+            <a:spAutoFit/>
+          </a:bodyPr>
+          <a:lstStyle/>
+          <a:p>
+            <a:pPr algn="l">
+              <a:lnSpc>
+                <a:spcPct val="110000"/>
+              </a:lnSpc>
+              <a:spcAft>
+                <a:spcPts val="0"/>
+              </a:spcAft>
+            </a:pPr>
+            <a:r>
+              <a:rPr sz="1100" b="1">
+                <a:solidFill>
+                  <a:srgbClr val="1F285A"/>
+                </a:solidFill>
+                <a:latin typeface="メイリオ"/>
+                <a:ea typeface="メイリオ"/>
+                <a:cs typeface="メイリオ"/>
+              </a:rPr>
+              <a:t>面談リマインド／セミナー案内／物件情報</a:t>
+            </a:r>
+          </a:p>
+        </p:txBody>
+      </p:sp>
+      <p:pic>
+        <p:nvPicPr>
+          <p:cNvPr id="26" name="Picture 25" descr="thanks_scene_3.png"/>
+          <p:cNvPicPr>
+            <a:picLocks noChangeAspect="1"/>
+          </p:cNvPicPr>
+          <p:nvPr/>
+        </p:nvPicPr>
+        <p:blipFill>
+          <a:blip r:embed="rId4"/>
+          <a:stretch>
+            <a:fillRect/>
+          </a:stretch>
+        </p:blipFill>
+        <p:spPr>
+          <a:xfrm>
+            <a:off x="4108168" y="4050000"/>
+            <a:ext cx="1771831" cy="2214000"/>
+          </a:xfrm>
+          <a:prstGeom prst="rect">
+            <a:avLst/>
+          </a:prstGeom>
+        </p:spPr>
+      </p:pic>
+      <p:sp>
+        <p:nvSpPr>
+          <p:cNvPr id="27" name="Oval 26"/>
+          <p:cNvSpPr/>
+          <p:nvPr/>
+        </p:nvSpPr>
+        <p:spPr>
+          <a:xfrm>
+            <a:off x="792000" y="4140000"/>
+            <a:ext cx="342000" cy="342000"/>
+          </a:xfrm>
+          <a:prstGeom prst="ellipse">
+            <a:avLst/>
+          </a:prstGeom>
+          <a:solidFill>
+            <a:srgbClr val="1F285A"/>
+          </a:solidFill>
+          <a:ln>
+            <a:noFill/>
           </a:ln>
           <a:effectLst/>
         </p:spPr>
@@ -5543,7 +6002,7 @@
           </a:fontRef>
         </p:style>
         <p:txBody>
-          <a:bodyPr rtlCol="0" anchor="ctr" wrap="square" lIns="36000" tIns="0" rIns="36000" bIns="0"/>
+          <a:bodyPr rtlCol="0" anchor="ctr" wrap="square" lIns="0" tIns="0" rIns="0" bIns="0"/>
           <a:lstStyle/>
           <a:p>
             <a:pPr algn="ctr">
@@ -5555,7 +6014,51 @@
               </a:spcAft>
             </a:pPr>
             <a:r>
-              <a:rPr sz="1150" b="1">
+              <a:rPr sz="1200" b="1">
+                <a:solidFill>
+                  <a:srgbClr val="FFFFFF"/>
+                </a:solidFill>
+                <a:latin typeface="メイリオ"/>
+                <a:ea typeface="メイリオ"/>
+                <a:cs typeface="メイリオ"/>
+              </a:rPr>
+              <a:t>3</a:t>
+            </a:r>
+          </a:p>
+        </p:txBody>
+      </p:sp>
+      <p:sp>
+        <p:nvSpPr>
+          <p:cNvPr id="28" name="TextBox 27"/>
+          <p:cNvSpPr txBox="1"/>
+          <p:nvPr/>
+        </p:nvSpPr>
+        <p:spPr>
+          <a:xfrm>
+            <a:off x="1224000" y="4104000"/>
+            <a:ext cx="2520000" cy="413999"/>
+          </a:xfrm>
+          <a:prstGeom prst="rect">
+            <a:avLst/>
+          </a:prstGeom>
+          <a:noFill/>
+        </p:spPr>
+        <p:txBody>
+          <a:bodyPr wrap="square" anchor="ctr" lIns="36000" rIns="36000" tIns="18000" bIns="18000">
+            <a:spAutoFit/>
+          </a:bodyPr>
+          <a:lstStyle/>
+          <a:p>
+            <a:pPr algn="l">
+              <a:lnSpc>
+                <a:spcPct val="110000"/>
+              </a:lnSpc>
+              <a:spcAft>
+                <a:spcPts val="0"/>
+              </a:spcAft>
+            </a:pPr>
+            <a:r>
+              <a:rPr sz="1600" b="1">
                 <a:solidFill>
                   <a:srgbClr val="1F285A"/>
                 </a:solidFill>
@@ -5563,34 +6066,32 @@
                 <a:ea typeface="メイリオ"/>
                 <a:cs typeface="メイリオ"/>
               </a:rPr>
-              <a:t>求人紹介</a:t>
-            </a:r>
-          </a:p>
-        </p:txBody>
-      </p:sp>
-      <p:sp>
-        <p:nvSpPr>
-          <p:cNvPr id="17" name="Rounded Rectangle 16"/>
+              <a:t>ホビー（toC）</a:t>
+            </a:r>
+          </a:p>
+        </p:txBody>
+      </p:sp>
+      <p:sp>
+        <p:nvSpPr>
+          <p:cNvPr id="29" name="Rounded Rectangle 28"/>
           <p:cNvSpPr/>
           <p:nvPr/>
         </p:nvSpPr>
         <p:spPr>
           <a:xfrm>
-            <a:off x="3851999" y="3221999"/>
-            <a:ext cx="2028000" cy="360000"/>
+            <a:off x="792000" y="4680000"/>
+            <a:ext cx="1224000" cy="756000"/>
           </a:xfrm>
           <a:prstGeom prst="roundRect">
             <a:avLst>
-              <a:gd name="adj" fmla="val 50000"/>
+              <a:gd name="adj" fmla="val 15000"/>
             </a:avLst>
           </a:prstGeom>
           <a:solidFill>
-            <a:srgbClr val="FFFFFF"/>
-          </a:solidFill>
-          <a:ln w="9525">
-            <a:solidFill>
-              <a:srgbClr val="1F285A"/>
-            </a:solidFill>
+            <a:srgbClr val="E4E8F6"/>
+          </a:solidFill>
+          <a:ln>
+            <a:noFill/>
           </a:ln>
           <a:effectLst/>
         </p:spPr>
@@ -5621,7 +6122,7 @@
               </a:spcAft>
             </a:pPr>
             <a:r>
-              <a:rPr sz="1150" b="1">
+              <a:rPr sz="1200" b="1">
                 <a:solidFill>
                   <a:srgbClr val="1F285A"/>
                 </a:solidFill>
@@ -5629,50 +6130,9 @@
                 <a:ea typeface="メイリオ"/>
                 <a:cs typeface="メイリオ"/>
               </a:rPr>
-              <a:t>選考のご案内</a:t>
-            </a:r>
-          </a:p>
-        </p:txBody>
-      </p:sp>
-      <p:sp>
-        <p:nvSpPr>
-          <p:cNvPr id="18" name="Oval 17"/>
-          <p:cNvSpPr/>
-          <p:nvPr/>
-        </p:nvSpPr>
-        <p:spPr>
-          <a:xfrm>
-            <a:off x="6312000" y="1782000"/>
-            <a:ext cx="342000" cy="342000"/>
-          </a:xfrm>
-          <a:prstGeom prst="ellipse">
-            <a:avLst/>
-          </a:prstGeom>
-          <a:solidFill>
-            <a:srgbClr val="1F285A"/>
-          </a:solidFill>
-          <a:ln>
-            <a:noFill/>
-          </a:ln>
-          <a:effectLst/>
-        </p:spPr>
-        <p:style>
-          <a:lnRef idx="1">
-            <a:schemeClr val="accent1"/>
-          </a:lnRef>
-          <a:fillRef idx="3">
-            <a:schemeClr val="accent1"/>
-          </a:fillRef>
-          <a:effectRef idx="0">
-            <a:schemeClr val="accent1"/>
-          </a:effectRef>
-          <a:fontRef idx="minor">
-            <a:schemeClr val="lt1"/>
-          </a:fontRef>
-        </p:style>
-        <p:txBody>
-          <a:bodyPr rtlCol="0" anchor="ctr" wrap="square" lIns="0" tIns="0" rIns="0" bIns="0"/>
-          <a:lstStyle/>
+              <a:t>購入・</a:t>
+            </a:r>
+          </a:p>
           <a:p>
             <a:pPr algn="ctr">
               <a:lnSpc>
@@ -5685,27 +6145,161 @@
             <a:r>
               <a:rPr sz="1200" b="1">
                 <a:solidFill>
+                  <a:srgbClr val="1F285A"/>
+                </a:solidFill>
+                <a:latin typeface="メイリオ"/>
+                <a:ea typeface="メイリオ"/>
+                <a:cs typeface="メイリオ"/>
+              </a:rPr>
+              <a:t>会員登録</a:t>
+            </a:r>
+          </a:p>
+        </p:txBody>
+      </p:sp>
+      <p:cxnSp>
+        <p:nvCxnSpPr>
+          <p:cNvPr id="30" name="Connector 29"/>
+          <p:cNvCxnSpPr/>
+          <p:nvPr/>
+        </p:nvCxnSpPr>
+        <p:spPr>
+          <a:xfrm>
+            <a:off x="2070000" y="5058000"/>
+            <a:ext cx="324000" cy="0"/>
+          </a:xfrm>
+          <a:prstGeom prst="line">
+            <a:avLst/>
+          </a:prstGeom>
+          <a:ln w="22225">
+            <a:solidFill>
+              <a:srgbClr val="1F285A"/>
+            </a:solidFill>
+            <a:tailEnd type="triangle" w="med" len="med"/>
+          </a:ln>
+        </p:spPr>
+        <p:style>
+          <a:lnRef idx="2">
+            <a:schemeClr val="accent1"/>
+          </a:lnRef>
+          <a:fillRef idx="0">
+            <a:schemeClr val="accent1"/>
+          </a:fillRef>
+          <a:effectRef idx="0">
+            <a:schemeClr val="accent1"/>
+          </a:effectRef>
+          <a:fontRef idx="minor">
+            <a:schemeClr val="tx1"/>
+          </a:fontRef>
+        </p:style>
+      </p:cxnSp>
+      <p:sp>
+        <p:nvSpPr>
+          <p:cNvPr id="31" name="Oval 30"/>
+          <p:cNvSpPr/>
+          <p:nvPr/>
+        </p:nvSpPr>
+        <p:spPr>
+          <a:xfrm>
+            <a:off x="2448000" y="4698000"/>
+            <a:ext cx="720000" cy="720000"/>
+          </a:xfrm>
+          <a:prstGeom prst="ellipse">
+            <a:avLst/>
+          </a:prstGeom>
+          <a:solidFill>
+            <a:srgbClr val="06C755"/>
+          </a:solidFill>
+          <a:ln>
+            <a:noFill/>
+          </a:ln>
+          <a:effectLst/>
+        </p:spPr>
+        <p:style>
+          <a:lnRef idx="1">
+            <a:schemeClr val="accent1"/>
+          </a:lnRef>
+          <a:fillRef idx="3">
+            <a:schemeClr val="accent1"/>
+          </a:fillRef>
+          <a:effectRef idx="0">
+            <a:schemeClr val="accent1"/>
+          </a:effectRef>
+          <a:fontRef idx="minor">
+            <a:schemeClr val="lt1"/>
+          </a:fontRef>
+        </p:style>
+        <p:txBody>
+          <a:bodyPr rtlCol="0" anchor="ctr" wrap="square" lIns="0" tIns="0" rIns="0" bIns="0"/>
+          <a:lstStyle/>
+          <a:p>
+            <a:pPr algn="ctr">
+              <a:lnSpc>
+                <a:spcPct val="110000"/>
+              </a:lnSpc>
+              <a:spcAft>
+                <a:spcPts val="0"/>
+              </a:spcAft>
+            </a:pPr>
+            <a:r>
+              <a:rPr sz="1200" b="1">
+                <a:solidFill>
                   <a:srgbClr val="FFFFFF"/>
                 </a:solidFill>
                 <a:latin typeface="メイリオ"/>
                 <a:ea typeface="メイリオ"/>
                 <a:cs typeface="メイリオ"/>
               </a:rPr>
-              <a:t>2</a:t>
-            </a:r>
-          </a:p>
-        </p:txBody>
-      </p:sp>
-      <p:sp>
-        <p:nvSpPr>
-          <p:cNvPr id="19" name="TextBox 18"/>
+              <a:t>LINE</a:t>
+            </a:r>
+          </a:p>
+        </p:txBody>
+      </p:sp>
+      <p:cxnSp>
+        <p:nvCxnSpPr>
+          <p:cNvPr id="32" name="Connector 31"/>
+          <p:cNvCxnSpPr/>
+          <p:nvPr/>
+        </p:nvCxnSpPr>
+        <p:spPr>
+          <a:xfrm>
+            <a:off x="3221999" y="5058000"/>
+            <a:ext cx="832169" cy="0"/>
+          </a:xfrm>
+          <a:prstGeom prst="line">
+            <a:avLst/>
+          </a:prstGeom>
+          <a:ln w="22225">
+            <a:solidFill>
+              <a:srgbClr val="1F285A"/>
+            </a:solidFill>
+            <a:tailEnd type="triangle" w="med" len="med"/>
+          </a:ln>
+        </p:spPr>
+        <p:style>
+          <a:lnRef idx="2">
+            <a:schemeClr val="accent1"/>
+          </a:lnRef>
+          <a:fillRef idx="0">
+            <a:schemeClr val="accent1"/>
+          </a:fillRef>
+          <a:effectRef idx="0">
+            <a:schemeClr val="accent1"/>
+          </a:effectRef>
+          <a:fontRef idx="minor">
+            <a:schemeClr val="tx1"/>
+          </a:fontRef>
+        </p:style>
+      </p:cxnSp>
+      <p:sp>
+        <p:nvSpPr>
+          <p:cNvPr id="33" name="TextBox 32"/>
           <p:cNvSpPr txBox="1"/>
           <p:nvPr/>
         </p:nvSpPr>
         <p:spPr>
           <a:xfrm>
-            <a:off x="6744000" y="1746000"/>
-            <a:ext cx="2340000" cy="413999"/>
+            <a:off x="792000" y="5580000"/>
+            <a:ext cx="3244168" cy="216000"/>
           </a:xfrm>
           <a:prstGeom prst="rect">
             <a:avLst/>
@@ -5713,7 +6307,7 @@
           <a:noFill/>
         </p:spPr>
         <p:txBody>
-          <a:bodyPr wrap="square" anchor="ctr" lIns="36000" rIns="36000" tIns="18000" bIns="18000">
+          <a:bodyPr wrap="square" anchor="t" lIns="36000" rIns="36000" tIns="18000" bIns="18000">
             <a:spAutoFit/>
           </a:bodyPr>
           <a:lstStyle/>
@@ -5727,29 +6321,29 @@
               </a:spcAft>
             </a:pPr>
             <a:r>
-              <a:rPr sz="1600" b="1">
-                <a:solidFill>
-                  <a:srgbClr val="1F285A"/>
-                </a:solidFill>
-                <a:latin typeface="メイリオ"/>
-                <a:ea typeface="メイリオ"/>
-                <a:cs typeface="メイリオ"/>
-              </a:rPr>
-              <a:t>不動産投資</a:t>
-            </a:r>
-          </a:p>
-        </p:txBody>
-      </p:sp>
-      <p:sp>
-        <p:nvSpPr>
-          <p:cNvPr id="20" name="TextBox 19"/>
+              <a:rPr sz="950" b="0">
+                <a:solidFill>
+                  <a:srgbClr val="7F7F7F"/>
+                </a:solidFill>
+                <a:latin typeface="メイリオ"/>
+                <a:ea typeface="メイリオ"/>
+                <a:cs typeface="メイリオ"/>
+              </a:rPr>
+              <a:t>その後の配信</a:t>
+            </a:r>
+          </a:p>
+        </p:txBody>
+      </p:sp>
+      <p:sp>
+        <p:nvSpPr>
+          <p:cNvPr id="34" name="TextBox 33"/>
           <p:cNvSpPr txBox="1"/>
           <p:nvPr/>
         </p:nvSpPr>
         <p:spPr>
           <a:xfrm>
-            <a:off x="8040000" y="1782000"/>
-            <a:ext cx="2880000" cy="342000"/>
+            <a:off x="792000" y="5778000"/>
+            <a:ext cx="3244168" cy="324000"/>
           </a:xfrm>
           <a:prstGeom prst="rect">
             <a:avLst/>
@@ -5757,7 +6351,7 @@
           <a:noFill/>
         </p:spPr>
         <p:txBody>
-          <a:bodyPr wrap="square" anchor="ctr" lIns="36000" rIns="36000" tIns="18000" bIns="18000">
+          <a:bodyPr wrap="square" anchor="t" lIns="36000" rIns="36000" tIns="18000" bIns="18000">
             <a:spAutoFit/>
           </a:bodyPr>
           <a:lstStyle/>
@@ -5771,37 +6365,59 @@
               </a:spcAft>
             </a:pPr>
             <a:r>
-              <a:rPr sz="1000" b="0">
-                <a:solidFill>
-                  <a:srgbClr val="7F7F7F"/>
-                </a:solidFill>
-                <a:latin typeface="メイリオ"/>
-                <a:ea typeface="メイリオ"/>
-                <a:cs typeface="メイリオ"/>
-              </a:rPr>
-              <a:t>資料請求・個別相談・セミナー</a:t>
-            </a:r>
-          </a:p>
-        </p:txBody>
-      </p:sp>
-      <p:sp>
-        <p:nvSpPr>
-          <p:cNvPr id="21" name="Rounded Rectangle 20"/>
+              <a:rPr sz="1100" b="1">
+                <a:solidFill>
+                  <a:srgbClr val="1F285A"/>
+                </a:solidFill>
+                <a:latin typeface="メイリオ"/>
+                <a:ea typeface="メイリオ"/>
+                <a:cs typeface="メイリオ"/>
+              </a:rPr>
+              <a:t>限定商品の案内／キャンペーン・クーポン</a:t>
+            </a:r>
+          </a:p>
+        </p:txBody>
+      </p:sp>
+      <p:pic>
+        <p:nvPicPr>
+          <p:cNvPr id="35" name="Picture 34" descr="thanks_scene_4.png"/>
+          <p:cNvPicPr>
+            <a:picLocks noChangeAspect="1"/>
+          </p:cNvPicPr>
+          <p:nvPr/>
+        </p:nvPicPr>
+        <p:blipFill>
+          <a:blip r:embed="rId5"/>
+          <a:stretch>
+            <a:fillRect/>
+          </a:stretch>
+        </p:blipFill>
+        <p:spPr>
+          <a:xfrm>
+            <a:off x="9628168" y="4050000"/>
+            <a:ext cx="1771831" cy="2214000"/>
+          </a:xfrm>
+          <a:prstGeom prst="rect">
+            <a:avLst/>
+          </a:prstGeom>
+        </p:spPr>
+      </p:pic>
+      <p:sp>
+        <p:nvSpPr>
+          <p:cNvPr id="36" name="Oval 35"/>
           <p:cNvSpPr/>
           <p:nvPr/>
         </p:nvSpPr>
         <p:spPr>
           <a:xfrm>
-            <a:off x="6312000" y="2520000"/>
-            <a:ext cx="1296000" cy="936000"/>
-          </a:xfrm>
-          <a:prstGeom prst="roundRect">
-            <a:avLst>
-              <a:gd name="adj" fmla="val 15000"/>
-            </a:avLst>
-          </a:prstGeom>
-          <a:solidFill>
-            <a:srgbClr val="E4E8F6"/>
+            <a:off x="6312000" y="4140000"/>
+            <a:ext cx="342000" cy="342000"/>
+          </a:xfrm>
+          <a:prstGeom prst="ellipse">
+            <a:avLst/>
+          </a:prstGeom>
+          <a:solidFill>
+            <a:srgbClr val="1F285A"/>
           </a:solidFill>
           <a:ln>
             <a:noFill/>
@@ -5823,7 +6439,7 @@
           </a:fontRef>
         </p:style>
         <p:txBody>
-          <a:bodyPr rtlCol="0" anchor="ctr" wrap="square" lIns="36000" tIns="0" rIns="36000" bIns="0"/>
+          <a:bodyPr rtlCol="0" anchor="ctr" wrap="square" lIns="0" tIns="0" rIns="0" bIns="0"/>
           <a:lstStyle/>
           <a:p>
             <a:pPr algn="ctr">
@@ -5837,15 +6453,102 @@
             <a:r>
               <a:rPr sz="1200" b="1">
                 <a:solidFill>
+                  <a:srgbClr val="FFFFFF"/>
+                </a:solidFill>
+                <a:latin typeface="メイリオ"/>
+                <a:ea typeface="メイリオ"/>
+                <a:cs typeface="メイリオ"/>
+              </a:rPr>
+              <a:t>4</a:t>
+            </a:r>
+          </a:p>
+        </p:txBody>
+      </p:sp>
+      <p:sp>
+        <p:nvSpPr>
+          <p:cNvPr id="37" name="TextBox 36"/>
+          <p:cNvSpPr txBox="1"/>
+          <p:nvPr/>
+        </p:nvSpPr>
+        <p:spPr>
+          <a:xfrm>
+            <a:off x="6744000" y="4104000"/>
+            <a:ext cx="2520000" cy="413999"/>
+          </a:xfrm>
+          <a:prstGeom prst="rect">
+            <a:avLst/>
+          </a:prstGeom>
+          <a:noFill/>
+        </p:spPr>
+        <p:txBody>
+          <a:bodyPr wrap="square" anchor="ctr" lIns="36000" rIns="36000" tIns="18000" bIns="18000">
+            <a:spAutoFit/>
+          </a:bodyPr>
+          <a:lstStyle/>
+          <a:p>
+            <a:pPr algn="l">
+              <a:lnSpc>
+                <a:spcPct val="110000"/>
+              </a:lnSpc>
+              <a:spcAft>
+                <a:spcPts val="0"/>
+              </a:spcAft>
+            </a:pPr>
+            <a:r>
+              <a:rPr sz="1600" b="1">
+                <a:solidFill>
                   <a:srgbClr val="1F285A"/>
                 </a:solidFill>
                 <a:latin typeface="メイリオ"/>
                 <a:ea typeface="メイリオ"/>
                 <a:cs typeface="メイリオ"/>
               </a:rPr>
-              <a:t>資料請求・</a:t>
-            </a:r>
-          </a:p>
+              <a:t>ハウスメーカー</a:t>
+            </a:r>
+          </a:p>
+        </p:txBody>
+      </p:sp>
+      <p:sp>
+        <p:nvSpPr>
+          <p:cNvPr id="38" name="Rounded Rectangle 37"/>
+          <p:cNvSpPr/>
+          <p:nvPr/>
+        </p:nvSpPr>
+        <p:spPr>
+          <a:xfrm>
+            <a:off x="6312000" y="4680000"/>
+            <a:ext cx="1224000" cy="756000"/>
+          </a:xfrm>
+          <a:prstGeom prst="roundRect">
+            <a:avLst>
+              <a:gd name="adj" fmla="val 15000"/>
+            </a:avLst>
+          </a:prstGeom>
+          <a:solidFill>
+            <a:srgbClr val="E4E8F6"/>
+          </a:solidFill>
+          <a:ln>
+            <a:noFill/>
+          </a:ln>
+          <a:effectLst/>
+        </p:spPr>
+        <p:style>
+          <a:lnRef idx="1">
+            <a:schemeClr val="accent1"/>
+          </a:lnRef>
+          <a:fillRef idx="3">
+            <a:schemeClr val="accent1"/>
+          </a:fillRef>
+          <a:effectRef idx="0">
+            <a:schemeClr val="accent1"/>
+          </a:effectRef>
+          <a:fontRef idx="minor">
+            <a:schemeClr val="lt1"/>
+          </a:fontRef>
+        </p:style>
+        <p:txBody>
+          <a:bodyPr rtlCol="0" anchor="ctr" wrap="square" lIns="36000" tIns="0" rIns="36000" bIns="0"/>
+          <a:lstStyle/>
           <a:p>
             <a:pPr algn="ctr">
               <a:lnSpc>
@@ -5864,86 +6567,9 @@
                 <a:ea typeface="メイリオ"/>
                 <a:cs typeface="メイリオ"/>
               </a:rPr>
-              <a:t>相談予約</a:t>
-            </a:r>
-          </a:p>
-        </p:txBody>
-      </p:sp>
-      <p:cxnSp>
-        <p:nvCxnSpPr>
-          <p:cNvPr id="22" name="Connector 21"/>
-          <p:cNvCxnSpPr/>
-          <p:nvPr/>
-        </p:nvCxnSpPr>
-        <p:spPr>
-          <a:xfrm>
-            <a:off x="7662000" y="2988000"/>
-            <a:ext cx="360000" cy="0"/>
-          </a:xfrm>
-          <a:prstGeom prst="line">
-            <a:avLst/>
-          </a:prstGeom>
-          <a:ln w="22225">
-            <a:solidFill>
-              <a:srgbClr val="1F285A"/>
-            </a:solidFill>
-            <a:tailEnd type="triangle" w="med" len="med"/>
-          </a:ln>
-        </p:spPr>
-        <p:style>
-          <a:lnRef idx="2">
-            <a:schemeClr val="accent1"/>
-          </a:lnRef>
-          <a:fillRef idx="0">
-            <a:schemeClr val="accent1"/>
-          </a:fillRef>
-          <a:effectRef idx="0">
-            <a:schemeClr val="accent1"/>
-          </a:effectRef>
-          <a:fontRef idx="minor">
-            <a:schemeClr val="tx1"/>
-          </a:fontRef>
-        </p:style>
-      </p:cxnSp>
-      <p:sp>
-        <p:nvSpPr>
-          <p:cNvPr id="23" name="Oval 22"/>
-          <p:cNvSpPr/>
-          <p:nvPr/>
-        </p:nvSpPr>
-        <p:spPr>
-          <a:xfrm>
-            <a:off x="8076000" y="2574000"/>
-            <a:ext cx="827999" cy="827999"/>
-          </a:xfrm>
-          <a:prstGeom prst="ellipse">
-            <a:avLst/>
-          </a:prstGeom>
-          <a:solidFill>
-            <a:srgbClr val="06C755"/>
-          </a:solidFill>
-          <a:ln>
-            <a:noFill/>
-          </a:ln>
-          <a:effectLst/>
-        </p:spPr>
-        <p:style>
-          <a:lnRef idx="1">
-            <a:schemeClr val="accent1"/>
-          </a:lnRef>
-          <a:fillRef idx="3">
-            <a:schemeClr val="accent1"/>
-          </a:fillRef>
-          <a:effectRef idx="0">
-            <a:schemeClr val="accent1"/>
-          </a:effectRef>
-          <a:fontRef idx="minor">
-            <a:schemeClr val="lt1"/>
-          </a:fontRef>
-        </p:style>
-        <p:txBody>
-          <a:bodyPr rtlCol="0" anchor="ctr" wrap="square" lIns="0" tIns="0" rIns="0" bIns="0"/>
-          <a:lstStyle/>
+              <a:t>資料請求・</a:t>
+            </a:r>
+          </a:p>
           <a:p>
             <a:pPr algn="ctr">
               <a:lnSpc>
@@ -5954,29 +6580,29 @@
               </a:spcAft>
             </a:pPr>
             <a:r>
-              <a:rPr sz="1300" b="1">
-                <a:solidFill>
-                  <a:srgbClr val="FFFFFF"/>
-                </a:solidFill>
-                <a:latin typeface="メイリオ"/>
-                <a:ea typeface="メイリオ"/>
-                <a:cs typeface="メイリオ"/>
-              </a:rPr>
-              <a:t>LINE</a:t>
+              <a:rPr sz="1200" b="1">
+                <a:solidFill>
+                  <a:srgbClr val="1F285A"/>
+                </a:solidFill>
+                <a:latin typeface="メイリオ"/>
+                <a:ea typeface="メイリオ"/>
+                <a:cs typeface="メイリオ"/>
+              </a:rPr>
+              <a:t>来場予約</a:t>
             </a:r>
           </a:p>
         </p:txBody>
       </p:sp>
       <p:cxnSp>
         <p:nvCxnSpPr>
-          <p:cNvPr id="24" name="Connector 23"/>
+          <p:cNvPr id="39" name="Connector 38"/>
           <p:cNvCxnSpPr/>
           <p:nvPr/>
         </p:nvCxnSpPr>
         <p:spPr>
           <a:xfrm>
-            <a:off x="8958000" y="2988000"/>
-            <a:ext cx="360000" cy="0"/>
+            <a:off x="7590000" y="5058000"/>
+            <a:ext cx="324000" cy="0"/>
           </a:xfrm>
           <a:prstGeom prst="line">
             <a:avLst/>
@@ -6005,27 +6631,23 @@
       </p:cxnSp>
       <p:sp>
         <p:nvSpPr>
-          <p:cNvPr id="25" name="Rounded Rectangle 24"/>
+          <p:cNvPr id="40" name="Oval 39"/>
           <p:cNvSpPr/>
           <p:nvPr/>
         </p:nvSpPr>
         <p:spPr>
           <a:xfrm>
-            <a:off x="9372000" y="2394000"/>
-            <a:ext cx="2028000" cy="360000"/>
-          </a:xfrm>
-          <a:prstGeom prst="roundRect">
-            <a:avLst>
-              <a:gd name="adj" fmla="val 50000"/>
-            </a:avLst>
-          </a:prstGeom>
-          <a:solidFill>
-            <a:srgbClr val="FFFFFF"/>
-          </a:solidFill>
-          <a:ln w="9525">
-            <a:solidFill>
-              <a:srgbClr val="1F285A"/>
-            </a:solidFill>
+            <a:off x="7968000" y="4698000"/>
+            <a:ext cx="720000" cy="720000"/>
+          </a:xfrm>
+          <a:prstGeom prst="ellipse">
+            <a:avLst/>
+          </a:prstGeom>
+          <a:solidFill>
+            <a:srgbClr val="06C755"/>
+          </a:solidFill>
+          <a:ln>
+            <a:noFill/>
           </a:ln>
           <a:effectLst/>
         </p:spPr>
@@ -6044,7 +6666,7 @@
           </a:fontRef>
         </p:style>
         <p:txBody>
-          <a:bodyPr rtlCol="0" anchor="ctr" wrap="square" lIns="36000" tIns="0" rIns="36000" bIns="0"/>
+          <a:bodyPr rtlCol="0" anchor="ctr" wrap="square" lIns="0" tIns="0" rIns="0" bIns="0"/>
           <a:lstStyle/>
           <a:p>
             <a:pPr algn="ctr">
@@ -6056,223 +6678,65 @@
               </a:spcAft>
             </a:pPr>
             <a:r>
-              <a:rPr sz="1150" b="1">
-                <a:solidFill>
-                  <a:srgbClr val="1F285A"/>
-                </a:solidFill>
-                <a:latin typeface="メイリオ"/>
-                <a:ea typeface="メイリオ"/>
-                <a:cs typeface="メイリオ"/>
-              </a:rPr>
-              <a:t>面談のリマインド</a:t>
-            </a:r>
-          </a:p>
-        </p:txBody>
-      </p:sp>
-      <p:sp>
-        <p:nvSpPr>
-          <p:cNvPr id="26" name="Rounded Rectangle 25"/>
-          <p:cNvSpPr/>
-          <p:nvPr/>
-        </p:nvSpPr>
-        <p:spPr>
-          <a:xfrm>
-            <a:off x="9372000" y="2808000"/>
-            <a:ext cx="2028000" cy="360000"/>
-          </a:xfrm>
-          <a:prstGeom prst="roundRect">
-            <a:avLst>
-              <a:gd name="adj" fmla="val 50000"/>
-            </a:avLst>
-          </a:prstGeom>
-          <a:solidFill>
-            <a:srgbClr val="FFFFFF"/>
-          </a:solidFill>
-          <a:ln w="9525">
+              <a:rPr sz="1200" b="1">
+                <a:solidFill>
+                  <a:srgbClr val="FFFFFF"/>
+                </a:solidFill>
+                <a:latin typeface="メイリオ"/>
+                <a:ea typeface="メイリオ"/>
+                <a:cs typeface="メイリオ"/>
+              </a:rPr>
+              <a:t>LINE</a:t>
+            </a:r>
+          </a:p>
+        </p:txBody>
+      </p:sp>
+      <p:cxnSp>
+        <p:nvCxnSpPr>
+          <p:cNvPr id="41" name="Connector 40"/>
+          <p:cNvCxnSpPr/>
+          <p:nvPr/>
+        </p:nvCxnSpPr>
+        <p:spPr>
+          <a:xfrm>
+            <a:off x="8742000" y="5058000"/>
+            <a:ext cx="832168" cy="0"/>
+          </a:xfrm>
+          <a:prstGeom prst="line">
+            <a:avLst/>
+          </a:prstGeom>
+          <a:ln w="22225">
             <a:solidFill>
               <a:srgbClr val="1F285A"/>
             </a:solidFill>
+            <a:tailEnd type="triangle" w="med" len="med"/>
           </a:ln>
-          <a:effectLst/>
         </p:spPr>
         <p:style>
-          <a:lnRef idx="1">
+          <a:lnRef idx="2">
             <a:schemeClr val="accent1"/>
           </a:lnRef>
-          <a:fillRef idx="3">
+          <a:fillRef idx="0">
             <a:schemeClr val="accent1"/>
           </a:fillRef>
           <a:effectRef idx="0">
             <a:schemeClr val="accent1"/>
           </a:effectRef>
           <a:fontRef idx="minor">
-            <a:schemeClr val="lt1"/>
+            <a:schemeClr val="tx1"/>
           </a:fontRef>
         </p:style>
-        <p:txBody>
-          <a:bodyPr rtlCol="0" anchor="ctr" wrap="square" lIns="36000" tIns="0" rIns="36000" bIns="0"/>
-          <a:lstStyle/>
-          <a:p>
-            <a:pPr algn="ctr">
-              <a:lnSpc>
-                <a:spcPct val="110000"/>
-              </a:lnSpc>
-              <a:spcAft>
-                <a:spcPts val="0"/>
-              </a:spcAft>
-            </a:pPr>
-            <a:r>
-              <a:rPr sz="1150" b="1">
-                <a:solidFill>
-                  <a:srgbClr val="1F285A"/>
-                </a:solidFill>
-                <a:latin typeface="メイリオ"/>
-                <a:ea typeface="メイリオ"/>
-                <a:cs typeface="メイリオ"/>
-              </a:rPr>
-              <a:t>セミナー案内</a:t>
-            </a:r>
-          </a:p>
-        </p:txBody>
-      </p:sp>
-      <p:sp>
-        <p:nvSpPr>
-          <p:cNvPr id="27" name="Rounded Rectangle 26"/>
-          <p:cNvSpPr/>
-          <p:nvPr/>
-        </p:nvSpPr>
-        <p:spPr>
-          <a:xfrm>
-            <a:off x="9372000" y="3221999"/>
-            <a:ext cx="2028000" cy="360000"/>
-          </a:xfrm>
-          <a:prstGeom prst="roundRect">
-            <a:avLst>
-              <a:gd name="adj" fmla="val 50000"/>
-            </a:avLst>
-          </a:prstGeom>
-          <a:solidFill>
-            <a:srgbClr val="FFFFFF"/>
-          </a:solidFill>
-          <a:ln w="9525">
-            <a:solidFill>
-              <a:srgbClr val="1F285A"/>
-            </a:solidFill>
-          </a:ln>
-          <a:effectLst/>
-        </p:spPr>
-        <p:style>
-          <a:lnRef idx="1">
-            <a:schemeClr val="accent1"/>
-          </a:lnRef>
-          <a:fillRef idx="3">
-            <a:schemeClr val="accent1"/>
-          </a:fillRef>
-          <a:effectRef idx="0">
-            <a:schemeClr val="accent1"/>
-          </a:effectRef>
-          <a:fontRef idx="minor">
-            <a:schemeClr val="lt1"/>
-          </a:fontRef>
-        </p:style>
-        <p:txBody>
-          <a:bodyPr rtlCol="0" anchor="ctr" wrap="square" lIns="36000" tIns="0" rIns="36000" bIns="0"/>
-          <a:lstStyle/>
-          <a:p>
-            <a:pPr algn="ctr">
-              <a:lnSpc>
-                <a:spcPct val="110000"/>
-              </a:lnSpc>
-              <a:spcAft>
-                <a:spcPts val="0"/>
-              </a:spcAft>
-            </a:pPr>
-            <a:r>
-              <a:rPr sz="1150" b="1">
-                <a:solidFill>
-                  <a:srgbClr val="1F285A"/>
-                </a:solidFill>
-                <a:latin typeface="メイリオ"/>
-                <a:ea typeface="メイリオ"/>
-                <a:cs typeface="メイリオ"/>
-              </a:rPr>
-              <a:t>物件情報</a:t>
-            </a:r>
-          </a:p>
-        </p:txBody>
-      </p:sp>
-      <p:sp>
-        <p:nvSpPr>
-          <p:cNvPr id="28" name="Oval 27"/>
-          <p:cNvSpPr/>
-          <p:nvPr/>
-        </p:nvSpPr>
-        <p:spPr>
-          <a:xfrm>
-            <a:off x="792000" y="4140000"/>
-            <a:ext cx="342000" cy="342000"/>
-          </a:xfrm>
-          <a:prstGeom prst="ellipse">
-            <a:avLst/>
-          </a:prstGeom>
-          <a:solidFill>
-            <a:srgbClr val="1F285A"/>
-          </a:solidFill>
-          <a:ln>
-            <a:noFill/>
-          </a:ln>
-          <a:effectLst/>
-        </p:spPr>
-        <p:style>
-          <a:lnRef idx="1">
-            <a:schemeClr val="accent1"/>
-          </a:lnRef>
-          <a:fillRef idx="3">
-            <a:schemeClr val="accent1"/>
-          </a:fillRef>
-          <a:effectRef idx="0">
-            <a:schemeClr val="accent1"/>
-          </a:effectRef>
-          <a:fontRef idx="minor">
-            <a:schemeClr val="lt1"/>
-          </a:fontRef>
-        </p:style>
-        <p:txBody>
-          <a:bodyPr rtlCol="0" anchor="ctr" wrap="square" lIns="0" tIns="0" rIns="0" bIns="0"/>
-          <a:lstStyle/>
-          <a:p>
-            <a:pPr algn="ctr">
-              <a:lnSpc>
-                <a:spcPct val="110000"/>
-              </a:lnSpc>
-              <a:spcAft>
-                <a:spcPts val="0"/>
-              </a:spcAft>
-            </a:pPr>
-            <a:r>
-              <a:rPr sz="1200" b="1">
-                <a:solidFill>
-                  <a:srgbClr val="FFFFFF"/>
-                </a:solidFill>
-                <a:latin typeface="メイリオ"/>
-                <a:ea typeface="メイリオ"/>
-                <a:cs typeface="メイリオ"/>
-              </a:rPr>
-              <a:t>3</a:t>
-            </a:r>
-          </a:p>
-        </p:txBody>
-      </p:sp>
-      <p:sp>
-        <p:nvSpPr>
-          <p:cNvPr id="29" name="TextBox 28"/>
+      </p:cxnSp>
+      <p:sp>
+        <p:nvSpPr>
+          <p:cNvPr id="42" name="TextBox 41"/>
           <p:cNvSpPr txBox="1"/>
           <p:nvPr/>
         </p:nvSpPr>
         <p:spPr>
           <a:xfrm>
-            <a:off x="1224000" y="4104000"/>
-            <a:ext cx="2340000" cy="413999"/>
+            <a:off x="6312000" y="5580000"/>
+            <a:ext cx="3244168" cy="216000"/>
           </a:xfrm>
           <a:prstGeom prst="rect">
             <a:avLst/>
@@ -6280,7 +6744,7 @@
           <a:noFill/>
         </p:spPr>
         <p:txBody>
-          <a:bodyPr wrap="square" anchor="ctr" lIns="36000" rIns="36000" tIns="18000" bIns="18000">
+          <a:bodyPr wrap="square" anchor="t" lIns="36000" rIns="36000" tIns="18000" bIns="18000">
             <a:spAutoFit/>
           </a:bodyPr>
           <a:lstStyle/>
@@ -6294,29 +6758,29 @@
               </a:spcAft>
             </a:pPr>
             <a:r>
-              <a:rPr sz="1600" b="1">
-                <a:solidFill>
-                  <a:srgbClr val="1F285A"/>
-                </a:solidFill>
-                <a:latin typeface="メイリオ"/>
-                <a:ea typeface="メイリオ"/>
-                <a:cs typeface="メイリオ"/>
-              </a:rPr>
-              <a:t>ホビー（toC）</a:t>
-            </a:r>
-          </a:p>
-        </p:txBody>
-      </p:sp>
-      <p:sp>
-        <p:nvSpPr>
-          <p:cNvPr id="30" name="TextBox 29"/>
+              <a:rPr sz="950" b="0">
+                <a:solidFill>
+                  <a:srgbClr val="7F7F7F"/>
+                </a:solidFill>
+                <a:latin typeface="メイリオ"/>
+                <a:ea typeface="メイリオ"/>
+                <a:cs typeface="メイリオ"/>
+              </a:rPr>
+              <a:t>その後の配信</a:t>
+            </a:r>
+          </a:p>
+        </p:txBody>
+      </p:sp>
+      <p:sp>
+        <p:nvSpPr>
+          <p:cNvPr id="43" name="TextBox 42"/>
           <p:cNvSpPr txBox="1"/>
           <p:nvPr/>
         </p:nvSpPr>
         <p:spPr>
           <a:xfrm>
-            <a:off x="3189600" y="4140000"/>
-            <a:ext cx="2880000" cy="342000"/>
+            <a:off x="6312000" y="5778000"/>
+            <a:ext cx="3244168" cy="324000"/>
           </a:xfrm>
           <a:prstGeom prst="rect">
             <a:avLst/>
@@ -6324,7 +6788,7 @@
           <a:noFill/>
         </p:spPr>
         <p:txBody>
-          <a:bodyPr wrap="square" anchor="ctr" lIns="36000" rIns="36000" tIns="18000" bIns="18000">
+          <a:bodyPr wrap="square" anchor="t" lIns="36000" rIns="36000" tIns="18000" bIns="18000">
             <a:spAutoFit/>
           </a:bodyPr>
           <a:lstStyle/>
@@ -6338,71 +6802,7 @@
               </a:spcAft>
             </a:pPr>
             <a:r>
-              <a:rPr sz="1000" b="0">
-                <a:solidFill>
-                  <a:srgbClr val="7F7F7F"/>
-                </a:solidFill>
-                <a:latin typeface="メイリオ"/>
-                <a:ea typeface="メイリオ"/>
-                <a:cs typeface="メイリオ"/>
-              </a:rPr>
-              <a:t>商品購入・会員登録</a:t>
-            </a:r>
-          </a:p>
-        </p:txBody>
-      </p:sp>
-      <p:sp>
-        <p:nvSpPr>
-          <p:cNvPr id="31" name="Rounded Rectangle 30"/>
-          <p:cNvSpPr/>
-          <p:nvPr/>
-        </p:nvSpPr>
-        <p:spPr>
-          <a:xfrm>
-            <a:off x="792000" y="4878000"/>
-            <a:ext cx="1296000" cy="936000"/>
-          </a:xfrm>
-          <a:prstGeom prst="roundRect">
-            <a:avLst>
-              <a:gd name="adj" fmla="val 15000"/>
-            </a:avLst>
-          </a:prstGeom>
-          <a:solidFill>
-            <a:srgbClr val="E4E8F6"/>
-          </a:solidFill>
-          <a:ln>
-            <a:noFill/>
-          </a:ln>
-          <a:effectLst/>
-        </p:spPr>
-        <p:style>
-          <a:lnRef idx="1">
-            <a:schemeClr val="accent1"/>
-          </a:lnRef>
-          <a:fillRef idx="3">
-            <a:schemeClr val="accent1"/>
-          </a:fillRef>
-          <a:effectRef idx="0">
-            <a:schemeClr val="accent1"/>
-          </a:effectRef>
-          <a:fontRef idx="minor">
-            <a:schemeClr val="lt1"/>
-          </a:fontRef>
-        </p:style>
-        <p:txBody>
-          <a:bodyPr rtlCol="0" anchor="ctr" wrap="square" lIns="36000" tIns="0" rIns="36000" bIns="0"/>
-          <a:lstStyle/>
-          <a:p>
-            <a:pPr algn="ctr">
-              <a:lnSpc>
-                <a:spcPct val="110000"/>
-              </a:lnSpc>
-              <a:spcAft>
-                <a:spcPts val="0"/>
-              </a:spcAft>
-            </a:pPr>
-            <a:r>
-              <a:rPr sz="1200" b="1">
+              <a:rPr sz="1100" b="1">
                 <a:solidFill>
                   <a:srgbClr val="1F285A"/>
                 </a:solidFill>
@@ -6410,934 +6810,14 @@
                 <a:ea typeface="メイリオ"/>
                 <a:cs typeface="メイリオ"/>
               </a:rPr>
-              <a:t>購入・</a:t>
-            </a:r>
-          </a:p>
-          <a:p>
-            <a:pPr algn="ctr">
-              <a:lnSpc>
-                <a:spcPct val="110000"/>
-              </a:lnSpc>
-              <a:spcAft>
-                <a:spcPts val="0"/>
-              </a:spcAft>
-            </a:pPr>
-            <a:r>
-              <a:rPr sz="1200" b="1">
-                <a:solidFill>
-                  <a:srgbClr val="1F285A"/>
-                </a:solidFill>
-                <a:latin typeface="メイリオ"/>
-                <a:ea typeface="メイリオ"/>
-                <a:cs typeface="メイリオ"/>
-              </a:rPr>
-              <a:t>会員登録</a:t>
-            </a:r>
-          </a:p>
-        </p:txBody>
-      </p:sp>
-      <p:cxnSp>
-        <p:nvCxnSpPr>
-          <p:cNvPr id="32" name="Connector 31"/>
-          <p:cNvCxnSpPr/>
-          <p:nvPr/>
-        </p:nvCxnSpPr>
-        <p:spPr>
-          <a:xfrm>
-            <a:off x="2142000" y="5346000"/>
-            <a:ext cx="360000" cy="0"/>
-          </a:xfrm>
-          <a:prstGeom prst="line">
-            <a:avLst/>
-          </a:prstGeom>
-          <a:ln w="22225">
-            <a:solidFill>
-              <a:srgbClr val="1F285A"/>
-            </a:solidFill>
-            <a:tailEnd type="triangle" w="med" len="med"/>
-          </a:ln>
-        </p:spPr>
-        <p:style>
-          <a:lnRef idx="2">
-            <a:schemeClr val="accent1"/>
-          </a:lnRef>
-          <a:fillRef idx="0">
-            <a:schemeClr val="accent1"/>
-          </a:fillRef>
-          <a:effectRef idx="0">
-            <a:schemeClr val="accent1"/>
-          </a:effectRef>
-          <a:fontRef idx="minor">
-            <a:schemeClr val="tx1"/>
-          </a:fontRef>
-        </p:style>
-      </p:cxnSp>
-      <p:sp>
-        <p:nvSpPr>
-          <p:cNvPr id="33" name="Oval 32"/>
-          <p:cNvSpPr/>
-          <p:nvPr/>
-        </p:nvSpPr>
-        <p:spPr>
-          <a:xfrm>
-            <a:off x="2556000" y="4932000"/>
-            <a:ext cx="827999" cy="827999"/>
-          </a:xfrm>
-          <a:prstGeom prst="ellipse">
-            <a:avLst/>
-          </a:prstGeom>
-          <a:solidFill>
-            <a:srgbClr val="06C755"/>
-          </a:solidFill>
-          <a:ln>
-            <a:noFill/>
-          </a:ln>
-          <a:effectLst/>
-        </p:spPr>
-        <p:style>
-          <a:lnRef idx="1">
-            <a:schemeClr val="accent1"/>
-          </a:lnRef>
-          <a:fillRef idx="3">
-            <a:schemeClr val="accent1"/>
-          </a:fillRef>
-          <a:effectRef idx="0">
-            <a:schemeClr val="accent1"/>
-          </a:effectRef>
-          <a:fontRef idx="minor">
-            <a:schemeClr val="lt1"/>
-          </a:fontRef>
-        </p:style>
-        <p:txBody>
-          <a:bodyPr rtlCol="0" anchor="ctr" wrap="square" lIns="0" tIns="0" rIns="0" bIns="0"/>
-          <a:lstStyle/>
-          <a:p>
-            <a:pPr algn="ctr">
-              <a:lnSpc>
-                <a:spcPct val="110000"/>
-              </a:lnSpc>
-              <a:spcAft>
-                <a:spcPts val="0"/>
-              </a:spcAft>
-            </a:pPr>
-            <a:r>
-              <a:rPr sz="1300" b="1">
-                <a:solidFill>
-                  <a:srgbClr val="FFFFFF"/>
-                </a:solidFill>
-                <a:latin typeface="メイリオ"/>
-                <a:ea typeface="メイリオ"/>
-                <a:cs typeface="メイリオ"/>
-              </a:rPr>
-              <a:t>LINE</a:t>
-            </a:r>
-          </a:p>
-        </p:txBody>
-      </p:sp>
-      <p:cxnSp>
-        <p:nvCxnSpPr>
-          <p:cNvPr id="34" name="Connector 33"/>
-          <p:cNvCxnSpPr/>
-          <p:nvPr/>
-        </p:nvCxnSpPr>
-        <p:spPr>
-          <a:xfrm>
-            <a:off x="3438000" y="5346000"/>
-            <a:ext cx="360000" cy="0"/>
-          </a:xfrm>
-          <a:prstGeom prst="line">
-            <a:avLst/>
-          </a:prstGeom>
-          <a:ln w="22225">
-            <a:solidFill>
-              <a:srgbClr val="1F285A"/>
-            </a:solidFill>
-            <a:tailEnd type="triangle" w="med" len="med"/>
-          </a:ln>
-        </p:spPr>
-        <p:style>
-          <a:lnRef idx="2">
-            <a:schemeClr val="accent1"/>
-          </a:lnRef>
-          <a:fillRef idx="0">
-            <a:schemeClr val="accent1"/>
-          </a:fillRef>
-          <a:effectRef idx="0">
-            <a:schemeClr val="accent1"/>
-          </a:effectRef>
-          <a:fontRef idx="minor">
-            <a:schemeClr val="tx1"/>
-          </a:fontRef>
-        </p:style>
-      </p:cxnSp>
-      <p:sp>
-        <p:nvSpPr>
-          <p:cNvPr id="35" name="Rounded Rectangle 34"/>
-          <p:cNvSpPr/>
-          <p:nvPr/>
-        </p:nvSpPr>
-        <p:spPr>
-          <a:xfrm>
-            <a:off x="3851999" y="4752000"/>
-            <a:ext cx="2028000" cy="360000"/>
-          </a:xfrm>
-          <a:prstGeom prst="roundRect">
-            <a:avLst>
-              <a:gd name="adj" fmla="val 50000"/>
-            </a:avLst>
-          </a:prstGeom>
-          <a:solidFill>
-            <a:srgbClr val="FFFFFF"/>
-          </a:solidFill>
-          <a:ln w="9525">
-            <a:solidFill>
-              <a:srgbClr val="1F285A"/>
-            </a:solidFill>
-          </a:ln>
-          <a:effectLst/>
-        </p:spPr>
-        <p:style>
-          <a:lnRef idx="1">
-            <a:schemeClr val="accent1"/>
-          </a:lnRef>
-          <a:fillRef idx="3">
-            <a:schemeClr val="accent1"/>
-          </a:fillRef>
-          <a:effectRef idx="0">
-            <a:schemeClr val="accent1"/>
-          </a:effectRef>
-          <a:fontRef idx="minor">
-            <a:schemeClr val="lt1"/>
-          </a:fontRef>
-        </p:style>
-        <p:txBody>
-          <a:bodyPr rtlCol="0" anchor="ctr" wrap="square" lIns="36000" tIns="0" rIns="36000" bIns="0"/>
-          <a:lstStyle/>
-          <a:p>
-            <a:pPr algn="ctr">
-              <a:lnSpc>
-                <a:spcPct val="110000"/>
-              </a:lnSpc>
-              <a:spcAft>
-                <a:spcPts val="0"/>
-              </a:spcAft>
-            </a:pPr>
-            <a:r>
-              <a:rPr sz="1150" b="1">
-                <a:solidFill>
-                  <a:srgbClr val="1F285A"/>
-                </a:solidFill>
-                <a:latin typeface="メイリオ"/>
-                <a:ea typeface="メイリオ"/>
-                <a:cs typeface="メイリオ"/>
-              </a:rPr>
-              <a:t>新商品・再入荷</a:t>
-            </a:r>
-          </a:p>
-        </p:txBody>
-      </p:sp>
-      <p:sp>
-        <p:nvSpPr>
-          <p:cNvPr id="36" name="Rounded Rectangle 35"/>
-          <p:cNvSpPr/>
-          <p:nvPr/>
-        </p:nvSpPr>
-        <p:spPr>
-          <a:xfrm>
-            <a:off x="3851999" y="5166000"/>
-            <a:ext cx="2028000" cy="360000"/>
-          </a:xfrm>
-          <a:prstGeom prst="roundRect">
-            <a:avLst>
-              <a:gd name="adj" fmla="val 50000"/>
-            </a:avLst>
-          </a:prstGeom>
-          <a:solidFill>
-            <a:srgbClr val="FFFFFF"/>
-          </a:solidFill>
-          <a:ln w="9525">
-            <a:solidFill>
-              <a:srgbClr val="1F285A"/>
-            </a:solidFill>
-          </a:ln>
-          <a:effectLst/>
-        </p:spPr>
-        <p:style>
-          <a:lnRef idx="1">
-            <a:schemeClr val="accent1"/>
-          </a:lnRef>
-          <a:fillRef idx="3">
-            <a:schemeClr val="accent1"/>
-          </a:fillRef>
-          <a:effectRef idx="0">
-            <a:schemeClr val="accent1"/>
-          </a:effectRef>
-          <a:fontRef idx="minor">
-            <a:schemeClr val="lt1"/>
-          </a:fontRef>
-        </p:style>
-        <p:txBody>
-          <a:bodyPr rtlCol="0" anchor="ctr" wrap="square" lIns="36000" tIns="0" rIns="36000" bIns="0"/>
-          <a:lstStyle/>
-          <a:p>
-            <a:pPr algn="ctr">
-              <a:lnSpc>
-                <a:spcPct val="110000"/>
-              </a:lnSpc>
-              <a:spcAft>
-                <a:spcPts val="0"/>
-              </a:spcAft>
-            </a:pPr>
-            <a:r>
-              <a:rPr sz="1150" b="1">
-                <a:solidFill>
-                  <a:srgbClr val="1F285A"/>
-                </a:solidFill>
-                <a:latin typeface="メイリオ"/>
-                <a:ea typeface="メイリオ"/>
-                <a:cs typeface="メイリオ"/>
-              </a:rPr>
-              <a:t>限定商品の案内</a:t>
-            </a:r>
-          </a:p>
-        </p:txBody>
-      </p:sp>
-      <p:sp>
-        <p:nvSpPr>
-          <p:cNvPr id="37" name="Rounded Rectangle 36"/>
-          <p:cNvSpPr/>
-          <p:nvPr/>
-        </p:nvSpPr>
-        <p:spPr>
-          <a:xfrm>
-            <a:off x="3851999" y="5580000"/>
-            <a:ext cx="2028000" cy="360000"/>
-          </a:xfrm>
-          <a:prstGeom prst="roundRect">
-            <a:avLst>
-              <a:gd name="adj" fmla="val 50000"/>
-            </a:avLst>
-          </a:prstGeom>
-          <a:solidFill>
-            <a:srgbClr val="FFFFFF"/>
-          </a:solidFill>
-          <a:ln w="9525">
-            <a:solidFill>
-              <a:srgbClr val="1F285A"/>
-            </a:solidFill>
-          </a:ln>
-          <a:effectLst/>
-        </p:spPr>
-        <p:style>
-          <a:lnRef idx="1">
-            <a:schemeClr val="accent1"/>
-          </a:lnRef>
-          <a:fillRef idx="3">
-            <a:schemeClr val="accent1"/>
-          </a:fillRef>
-          <a:effectRef idx="0">
-            <a:schemeClr val="accent1"/>
-          </a:effectRef>
-          <a:fontRef idx="minor">
-            <a:schemeClr val="lt1"/>
-          </a:fontRef>
-        </p:style>
-        <p:txBody>
-          <a:bodyPr rtlCol="0" anchor="ctr" wrap="square" lIns="36000" tIns="0" rIns="36000" bIns="0"/>
-          <a:lstStyle/>
-          <a:p>
-            <a:pPr algn="ctr">
-              <a:lnSpc>
-                <a:spcPct val="110000"/>
-              </a:lnSpc>
-              <a:spcAft>
-                <a:spcPts val="0"/>
-              </a:spcAft>
-            </a:pPr>
-            <a:r>
-              <a:rPr sz="1150" b="1">
-                <a:solidFill>
-                  <a:srgbClr val="1F285A"/>
-                </a:solidFill>
-                <a:latin typeface="メイリオ"/>
-                <a:ea typeface="メイリオ"/>
-                <a:cs typeface="メイリオ"/>
-              </a:rPr>
-              <a:t>キャンペーン・クーポン</a:t>
-            </a:r>
-          </a:p>
-        </p:txBody>
-      </p:sp>
-      <p:sp>
-        <p:nvSpPr>
-          <p:cNvPr id="38" name="Oval 37"/>
-          <p:cNvSpPr/>
-          <p:nvPr/>
-        </p:nvSpPr>
-        <p:spPr>
-          <a:xfrm>
-            <a:off x="6312000" y="4140000"/>
-            <a:ext cx="342000" cy="342000"/>
-          </a:xfrm>
-          <a:prstGeom prst="ellipse">
-            <a:avLst/>
-          </a:prstGeom>
-          <a:solidFill>
-            <a:srgbClr val="1F285A"/>
-          </a:solidFill>
-          <a:ln>
-            <a:noFill/>
-          </a:ln>
-          <a:effectLst/>
-        </p:spPr>
-        <p:style>
-          <a:lnRef idx="1">
-            <a:schemeClr val="accent1"/>
-          </a:lnRef>
-          <a:fillRef idx="3">
-            <a:schemeClr val="accent1"/>
-          </a:fillRef>
-          <a:effectRef idx="0">
-            <a:schemeClr val="accent1"/>
-          </a:effectRef>
-          <a:fontRef idx="minor">
-            <a:schemeClr val="lt1"/>
-          </a:fontRef>
-        </p:style>
-        <p:txBody>
-          <a:bodyPr rtlCol="0" anchor="ctr" wrap="square" lIns="0" tIns="0" rIns="0" bIns="0"/>
-          <a:lstStyle/>
-          <a:p>
-            <a:pPr algn="ctr">
-              <a:lnSpc>
-                <a:spcPct val="110000"/>
-              </a:lnSpc>
-              <a:spcAft>
-                <a:spcPts val="0"/>
-              </a:spcAft>
-            </a:pPr>
-            <a:r>
-              <a:rPr sz="1200" b="1">
-                <a:solidFill>
-                  <a:srgbClr val="FFFFFF"/>
-                </a:solidFill>
-                <a:latin typeface="メイリオ"/>
-                <a:ea typeface="メイリオ"/>
-                <a:cs typeface="メイリオ"/>
-              </a:rPr>
-              <a:t>4</a:t>
-            </a:r>
-          </a:p>
-        </p:txBody>
-      </p:sp>
-      <p:sp>
-        <p:nvSpPr>
-          <p:cNvPr id="39" name="TextBox 38"/>
-          <p:cNvSpPr txBox="1"/>
-          <p:nvPr/>
-        </p:nvSpPr>
-        <p:spPr>
-          <a:xfrm>
-            <a:off x="6744000" y="4104000"/>
-            <a:ext cx="2340000" cy="413999"/>
-          </a:xfrm>
-          <a:prstGeom prst="rect">
-            <a:avLst/>
-          </a:prstGeom>
-          <a:noFill/>
-        </p:spPr>
-        <p:txBody>
-          <a:bodyPr wrap="square" anchor="ctr" lIns="36000" rIns="36000" tIns="18000" bIns="18000">
-            <a:spAutoFit/>
-          </a:bodyPr>
-          <a:lstStyle/>
-          <a:p>
-            <a:pPr algn="l">
-              <a:lnSpc>
-                <a:spcPct val="110000"/>
-              </a:lnSpc>
-              <a:spcAft>
-                <a:spcPts val="0"/>
-              </a:spcAft>
-            </a:pPr>
-            <a:r>
-              <a:rPr sz="1600" b="1">
-                <a:solidFill>
-                  <a:srgbClr val="1F285A"/>
-                </a:solidFill>
-                <a:latin typeface="メイリオ"/>
-                <a:ea typeface="メイリオ"/>
-                <a:cs typeface="メイリオ"/>
-              </a:rPr>
-              <a:t>ハウスメーカー</a:t>
-            </a:r>
-          </a:p>
-        </p:txBody>
-      </p:sp>
-      <p:sp>
-        <p:nvSpPr>
-          <p:cNvPr id="40" name="TextBox 39"/>
-          <p:cNvSpPr txBox="1"/>
-          <p:nvPr/>
-        </p:nvSpPr>
-        <p:spPr>
-          <a:xfrm>
-            <a:off x="8486400" y="4140000"/>
-            <a:ext cx="2880000" cy="342000"/>
-          </a:xfrm>
-          <a:prstGeom prst="rect">
-            <a:avLst/>
-          </a:prstGeom>
-          <a:noFill/>
-        </p:spPr>
-        <p:txBody>
-          <a:bodyPr wrap="square" anchor="ctr" lIns="36000" rIns="36000" tIns="18000" bIns="18000">
-            <a:spAutoFit/>
-          </a:bodyPr>
-          <a:lstStyle/>
-          <a:p>
-            <a:pPr algn="l">
-              <a:lnSpc>
-                <a:spcPct val="110000"/>
-              </a:lnSpc>
-              <a:spcAft>
-                <a:spcPts val="0"/>
-              </a:spcAft>
-            </a:pPr>
-            <a:r>
-              <a:rPr sz="1000" b="0">
-                <a:solidFill>
-                  <a:srgbClr val="7F7F7F"/>
-                </a:solidFill>
-                <a:latin typeface="メイリオ"/>
-                <a:ea typeface="メイリオ"/>
-                <a:cs typeface="メイリオ"/>
-              </a:rPr>
-              <a:t>資料請求・展示場の来場予約</a:t>
-            </a:r>
-          </a:p>
-        </p:txBody>
-      </p:sp>
-      <p:sp>
-        <p:nvSpPr>
-          <p:cNvPr id="41" name="Rounded Rectangle 40"/>
-          <p:cNvSpPr/>
-          <p:nvPr/>
-        </p:nvSpPr>
-        <p:spPr>
-          <a:xfrm>
-            <a:off x="6312000" y="4878000"/>
-            <a:ext cx="1296000" cy="936000"/>
-          </a:xfrm>
-          <a:prstGeom prst="roundRect">
-            <a:avLst>
-              <a:gd name="adj" fmla="val 15000"/>
-            </a:avLst>
-          </a:prstGeom>
-          <a:solidFill>
-            <a:srgbClr val="E4E8F6"/>
-          </a:solidFill>
-          <a:ln>
-            <a:noFill/>
-          </a:ln>
-          <a:effectLst/>
-        </p:spPr>
-        <p:style>
-          <a:lnRef idx="1">
-            <a:schemeClr val="accent1"/>
-          </a:lnRef>
-          <a:fillRef idx="3">
-            <a:schemeClr val="accent1"/>
-          </a:fillRef>
-          <a:effectRef idx="0">
-            <a:schemeClr val="accent1"/>
-          </a:effectRef>
-          <a:fontRef idx="minor">
-            <a:schemeClr val="lt1"/>
-          </a:fontRef>
-        </p:style>
-        <p:txBody>
-          <a:bodyPr rtlCol="0" anchor="ctr" wrap="square" lIns="36000" tIns="0" rIns="36000" bIns="0"/>
-          <a:lstStyle/>
-          <a:p>
-            <a:pPr algn="ctr">
-              <a:lnSpc>
-                <a:spcPct val="110000"/>
-              </a:lnSpc>
-              <a:spcAft>
-                <a:spcPts val="0"/>
-              </a:spcAft>
-            </a:pPr>
-            <a:r>
-              <a:rPr sz="1200" b="1">
-                <a:solidFill>
-                  <a:srgbClr val="1F285A"/>
-                </a:solidFill>
-                <a:latin typeface="メイリオ"/>
-                <a:ea typeface="メイリオ"/>
-                <a:cs typeface="メイリオ"/>
-              </a:rPr>
-              <a:t>資料請求・</a:t>
-            </a:r>
-          </a:p>
-          <a:p>
-            <a:pPr algn="ctr">
-              <a:lnSpc>
-                <a:spcPct val="110000"/>
-              </a:lnSpc>
-              <a:spcAft>
-                <a:spcPts val="0"/>
-              </a:spcAft>
-            </a:pPr>
-            <a:r>
-              <a:rPr sz="1200" b="1">
-                <a:solidFill>
-                  <a:srgbClr val="1F285A"/>
-                </a:solidFill>
-                <a:latin typeface="メイリオ"/>
-                <a:ea typeface="メイリオ"/>
-                <a:cs typeface="メイリオ"/>
-              </a:rPr>
-              <a:t>来場予約</a:t>
-            </a:r>
-          </a:p>
-        </p:txBody>
-      </p:sp>
-      <p:cxnSp>
-        <p:nvCxnSpPr>
-          <p:cNvPr id="42" name="Connector 41"/>
-          <p:cNvCxnSpPr/>
-          <p:nvPr/>
-        </p:nvCxnSpPr>
-        <p:spPr>
-          <a:xfrm>
-            <a:off x="7662000" y="5346000"/>
-            <a:ext cx="360000" cy="0"/>
-          </a:xfrm>
-          <a:prstGeom prst="line">
-            <a:avLst/>
-          </a:prstGeom>
-          <a:ln w="22225">
-            <a:solidFill>
-              <a:srgbClr val="1F285A"/>
-            </a:solidFill>
-            <a:tailEnd type="triangle" w="med" len="med"/>
-          </a:ln>
-        </p:spPr>
-        <p:style>
-          <a:lnRef idx="2">
-            <a:schemeClr val="accent1"/>
-          </a:lnRef>
-          <a:fillRef idx="0">
-            <a:schemeClr val="accent1"/>
-          </a:fillRef>
-          <a:effectRef idx="0">
-            <a:schemeClr val="accent1"/>
-          </a:effectRef>
-          <a:fontRef idx="minor">
-            <a:schemeClr val="tx1"/>
-          </a:fontRef>
-        </p:style>
-      </p:cxnSp>
-      <p:sp>
-        <p:nvSpPr>
-          <p:cNvPr id="43" name="Oval 42"/>
-          <p:cNvSpPr/>
-          <p:nvPr/>
-        </p:nvSpPr>
-        <p:spPr>
-          <a:xfrm>
-            <a:off x="8076000" y="4932000"/>
-            <a:ext cx="827999" cy="827999"/>
-          </a:xfrm>
-          <a:prstGeom prst="ellipse">
-            <a:avLst/>
-          </a:prstGeom>
-          <a:solidFill>
-            <a:srgbClr val="06C755"/>
-          </a:solidFill>
-          <a:ln>
-            <a:noFill/>
-          </a:ln>
-          <a:effectLst/>
-        </p:spPr>
-        <p:style>
-          <a:lnRef idx="1">
-            <a:schemeClr val="accent1"/>
-          </a:lnRef>
-          <a:fillRef idx="3">
-            <a:schemeClr val="accent1"/>
-          </a:fillRef>
-          <a:effectRef idx="0">
-            <a:schemeClr val="accent1"/>
-          </a:effectRef>
-          <a:fontRef idx="minor">
-            <a:schemeClr val="lt1"/>
-          </a:fontRef>
-        </p:style>
-        <p:txBody>
-          <a:bodyPr rtlCol="0" anchor="ctr" wrap="square" lIns="0" tIns="0" rIns="0" bIns="0"/>
-          <a:lstStyle/>
-          <a:p>
-            <a:pPr algn="ctr">
-              <a:lnSpc>
-                <a:spcPct val="110000"/>
-              </a:lnSpc>
-              <a:spcAft>
-                <a:spcPts val="0"/>
-              </a:spcAft>
-            </a:pPr>
-            <a:r>
-              <a:rPr sz="1300" b="1">
-                <a:solidFill>
-                  <a:srgbClr val="FFFFFF"/>
-                </a:solidFill>
-                <a:latin typeface="メイリオ"/>
-                <a:ea typeface="メイリオ"/>
-                <a:cs typeface="メイリオ"/>
-              </a:rPr>
-              <a:t>LINE</a:t>
-            </a:r>
-          </a:p>
-        </p:txBody>
-      </p:sp>
-      <p:cxnSp>
-        <p:nvCxnSpPr>
-          <p:cNvPr id="44" name="Connector 43"/>
-          <p:cNvCxnSpPr/>
-          <p:nvPr/>
-        </p:nvCxnSpPr>
-        <p:spPr>
-          <a:xfrm>
-            <a:off x="8958000" y="5346000"/>
-            <a:ext cx="360000" cy="0"/>
-          </a:xfrm>
-          <a:prstGeom prst="line">
-            <a:avLst/>
-          </a:prstGeom>
-          <a:ln w="22225">
-            <a:solidFill>
-              <a:srgbClr val="1F285A"/>
-            </a:solidFill>
-            <a:tailEnd type="triangle" w="med" len="med"/>
-          </a:ln>
-        </p:spPr>
-        <p:style>
-          <a:lnRef idx="2">
-            <a:schemeClr val="accent1"/>
-          </a:lnRef>
-          <a:fillRef idx="0">
-            <a:schemeClr val="accent1"/>
-          </a:fillRef>
-          <a:effectRef idx="0">
-            <a:schemeClr val="accent1"/>
-          </a:effectRef>
-          <a:fontRef idx="minor">
-            <a:schemeClr val="tx1"/>
-          </a:fontRef>
-        </p:style>
-      </p:cxnSp>
-      <p:sp>
-        <p:nvSpPr>
-          <p:cNvPr id="45" name="Rounded Rectangle 44"/>
-          <p:cNvSpPr/>
-          <p:nvPr/>
-        </p:nvSpPr>
-        <p:spPr>
-          <a:xfrm>
-            <a:off x="9372000" y="4752000"/>
-            <a:ext cx="2028000" cy="360000"/>
-          </a:xfrm>
-          <a:prstGeom prst="roundRect">
-            <a:avLst>
-              <a:gd name="adj" fmla="val 50000"/>
-            </a:avLst>
-          </a:prstGeom>
-          <a:solidFill>
-            <a:srgbClr val="FFFFFF"/>
-          </a:solidFill>
-          <a:ln w="9525">
-            <a:solidFill>
-              <a:srgbClr val="1F285A"/>
-            </a:solidFill>
-          </a:ln>
-          <a:effectLst/>
-        </p:spPr>
-        <p:style>
-          <a:lnRef idx="1">
-            <a:schemeClr val="accent1"/>
-          </a:lnRef>
-          <a:fillRef idx="3">
-            <a:schemeClr val="accent1"/>
-          </a:fillRef>
-          <a:effectRef idx="0">
-            <a:schemeClr val="accent1"/>
-          </a:effectRef>
-          <a:fontRef idx="minor">
-            <a:schemeClr val="lt1"/>
-          </a:fontRef>
-        </p:style>
-        <p:txBody>
-          <a:bodyPr rtlCol="0" anchor="ctr" wrap="square" lIns="36000" tIns="0" rIns="36000" bIns="0"/>
-          <a:lstStyle/>
-          <a:p>
-            <a:pPr algn="ctr">
-              <a:lnSpc>
-                <a:spcPct val="110000"/>
-              </a:lnSpc>
-              <a:spcAft>
-                <a:spcPts val="0"/>
-              </a:spcAft>
-            </a:pPr>
-            <a:r>
-              <a:rPr sz="1150" b="1">
-                <a:solidFill>
-                  <a:srgbClr val="1F285A"/>
-                </a:solidFill>
-                <a:latin typeface="メイリオ"/>
-                <a:ea typeface="メイリオ"/>
-                <a:cs typeface="メイリオ"/>
-              </a:rPr>
-              <a:t>来場前日のリマインド</a:t>
-            </a:r>
-          </a:p>
-        </p:txBody>
-      </p:sp>
-      <p:sp>
-        <p:nvSpPr>
-          <p:cNvPr id="46" name="Rounded Rectangle 45"/>
-          <p:cNvSpPr/>
-          <p:nvPr/>
-        </p:nvSpPr>
-        <p:spPr>
-          <a:xfrm>
-            <a:off x="9372000" y="5166000"/>
-            <a:ext cx="2028000" cy="360000"/>
-          </a:xfrm>
-          <a:prstGeom prst="roundRect">
-            <a:avLst>
-              <a:gd name="adj" fmla="val 50000"/>
-            </a:avLst>
-          </a:prstGeom>
-          <a:solidFill>
-            <a:srgbClr val="FFFFFF"/>
-          </a:solidFill>
-          <a:ln w="9525">
-            <a:solidFill>
-              <a:srgbClr val="1F285A"/>
-            </a:solidFill>
-          </a:ln>
-          <a:effectLst/>
-        </p:spPr>
-        <p:style>
-          <a:lnRef idx="1">
-            <a:schemeClr val="accent1"/>
-          </a:lnRef>
-          <a:fillRef idx="3">
-            <a:schemeClr val="accent1"/>
-          </a:fillRef>
-          <a:effectRef idx="0">
-            <a:schemeClr val="accent1"/>
-          </a:effectRef>
-          <a:fontRef idx="minor">
-            <a:schemeClr val="lt1"/>
-          </a:fontRef>
-        </p:style>
-        <p:txBody>
-          <a:bodyPr rtlCol="0" anchor="ctr" wrap="square" lIns="36000" tIns="0" rIns="36000" bIns="0"/>
-          <a:lstStyle/>
-          <a:p>
-            <a:pPr algn="ctr">
-              <a:lnSpc>
-                <a:spcPct val="110000"/>
-              </a:lnSpc>
-              <a:spcAft>
-                <a:spcPts val="0"/>
-              </a:spcAft>
-            </a:pPr>
-            <a:r>
-              <a:rPr sz="1150" b="1">
-                <a:solidFill>
-                  <a:srgbClr val="1F285A"/>
-                </a:solidFill>
-                <a:latin typeface="メイリオ"/>
-                <a:ea typeface="メイリオ"/>
-                <a:cs typeface="メイリオ"/>
-              </a:rPr>
-              <a:t>施工事例</a:t>
-            </a:r>
-          </a:p>
-        </p:txBody>
-      </p:sp>
-      <p:sp>
-        <p:nvSpPr>
-          <p:cNvPr id="47" name="Rounded Rectangle 46"/>
-          <p:cNvSpPr/>
-          <p:nvPr/>
-        </p:nvSpPr>
-        <p:spPr>
-          <a:xfrm>
-            <a:off x="9372000" y="5580000"/>
-            <a:ext cx="2028000" cy="360000"/>
-          </a:xfrm>
-          <a:prstGeom prst="roundRect">
-            <a:avLst>
-              <a:gd name="adj" fmla="val 50000"/>
-            </a:avLst>
-          </a:prstGeom>
-          <a:solidFill>
-            <a:srgbClr val="FFFFFF"/>
-          </a:solidFill>
-          <a:ln w="9525">
-            <a:solidFill>
-              <a:srgbClr val="1F285A"/>
-            </a:solidFill>
-          </a:ln>
-          <a:effectLst/>
-        </p:spPr>
-        <p:style>
-          <a:lnRef idx="1">
-            <a:schemeClr val="accent1"/>
-          </a:lnRef>
-          <a:fillRef idx="3">
-            <a:schemeClr val="accent1"/>
-          </a:fillRef>
-          <a:effectRef idx="0">
-            <a:schemeClr val="accent1"/>
-          </a:effectRef>
-          <a:fontRef idx="minor">
-            <a:schemeClr val="lt1"/>
-          </a:fontRef>
-        </p:style>
-        <p:txBody>
-          <a:bodyPr rtlCol="0" anchor="ctr" wrap="square" lIns="36000" tIns="0" rIns="36000" bIns="0"/>
-          <a:lstStyle/>
-          <a:p>
-            <a:pPr algn="ctr">
-              <a:lnSpc>
-                <a:spcPct val="110000"/>
-              </a:lnSpc>
-              <a:spcAft>
-                <a:spcPts val="0"/>
-              </a:spcAft>
-            </a:pPr>
-            <a:r>
-              <a:rPr sz="1150" b="1">
-                <a:solidFill>
-                  <a:srgbClr val="1F285A"/>
-                </a:solidFill>
-                <a:latin typeface="メイリオ"/>
-                <a:ea typeface="メイリオ"/>
-                <a:cs typeface="メイリオ"/>
-              </a:rPr>
-              <a:t>見学会・個別相談</a:t>
-            </a:r>
-          </a:p>
-        </p:txBody>
-      </p:sp>
-      <p:sp>
-        <p:nvSpPr>
-          <p:cNvPr id="48" name="TextBox 47"/>
+              <a:t>見学会の案内／土地情報／個別相談</a:t>
+            </a:r>
+          </a:p>
+        </p:txBody>
+      </p:sp>
+      <p:sp>
+        <p:nvSpPr>
+          <p:cNvPr id="44" name="TextBox 43"/>
           <p:cNvSpPr txBox="1"/>
           <p:nvPr/>
         </p:nvSpPr>
